--- a/kvcache/unified_kv_memory/立项汇报PPTX/推理性能理论论证_20260907_Luna/统一异构KVCache存储池_推理性能理论论证_KPCL_20260908_v3_文风修订_正式演讲版.pptx
+++ b/kvcache/unified_kv_memory/立项汇报PPTX/推理性能理论论证_20260907_Luna/统一异构KVCache存储池_推理性能理论论证_KPCL_20260908_v3_文风修订_正式演讲版.pptx
@@ -519,7 +519,7 @@
           <a:lstStyle/>
           <a:p>
             <a:r>
-              <a:t>各位领导、专家好。针对上一轮评审提出的核心关切，我们全面审视了汇报逻辑。单纯从宏观层面陈述必要性容易显得空泛，单纯拿 18 微秒查询数据又显得单薄。今天我们从计算机体系结构和执行路径的第一性原理出发，系统回答三个最尖锐的问题：第一，开源有方案、底层有通信库，为什么必须由我们自研这套软件？第二，在没有全量硬件实测前，我们如何用物理常数证明端到端 TTFT、TPOT 和尾延迟能大幅提升？第三，我们与底层通信库到底是什么关系，如何证明我们能催熟底层？在此特别说明，全套文稿中我们对所有数据均严格标注了实测值、假设值、推导值和目标值，绝不将推导值混为已兑现实测。</a:t>
+              <a:t>各位评委、各位专家，今天向大家正式汇报‘统一异构 KVCache 存储池’的关键性能理论建模与 KPCL 诉求推导。在正式进入技术方案之前，我们先开门见山回答大家最关心的三个核心问题：第一，开源有 vLLM，底层有 KPCL 通信库，为什么必须做这套常驻运行的 KVC 软件？第二，仅凭 18 微秒的哈希查询，如何证明能为整机带来 20% 以上的端到端提速？第三，自研软件和原厂通信底座到底是什么共生关系，如何反向催熟通信底座？本汇报完全立足计算机体系结构第一性原理，用严格的数学推导与物理常数对账，给出不可辩驳的技术依据。</a:t>
             </a:r>
           </a:p>
         </p:txBody>
@@ -1219,7 +1219,7 @@
           <a:lstStyle/>
           <a:p>
             <a:r>
-              <a:t>上一轮评审中，评委的质疑非常中肯。评委最担心的无非是三点：第一，开源有的东西，底层通信团队也能做的东西，为什么非要单独拉一支团队做 KVC 软件？第二，你们现在只有一个 18 微秒的前缀查询，在 250 毫秒的 TTFT 里连零头都算不上，怎么敢说整机性能提升？第三，你们和底座团队是不是在抢活，怎么证明你们是在帮底座？这页把这三个问题摆在台面上，后文每一页都是针对这三个问题的硬核回答。</a:t>
+              <a:t>这里向各位评委和盘托出我们对三大质疑的严密推导逻辑。针对‘为什么要做中间件’，我们指明了系统调度断层；针对‘18 微秒怎么变成 20%’，我们用物理常数证明瓶颈在 24.5 毫秒的数据搬运，并通过逐层流水掩盖了 98.7% 的耗时；针对‘怎么证明能催熟通信底座’，我们提炼了 8 类典型业务流量画像，直接给 KPCL 提供了可执行契约与实战靶场。我们承诺：不知为不知，绝不虚构数据，用阶段门禁把研发风险锁在笼子里。</a:t>
             </a:r>
           </a:p>
         </p:txBody>
@@ -1289,7 +1289,7 @@
           <a:lstStyle/>
           <a:p>
             <a:r>
-              <a:t>这页回答为什么不能让推理框架直接调底层通信库。推理框架像 vLLM 或 MindIE，核心是 Python 写的，它的调度周期是毫秒级的，它根本看不到网卡队列有没有积压，看不到显存总线有没有被抢占。而底层的 KPCL 通信库是 C 和驱动写的，它只知道把一段内存搬到另一段内存，它根本不知道当前大模型是在算第几层 Attention，更不知道前台在逐字生成。如果让上层直接无脑调下层，多卡并发一上来交换机直接被打崩，后台一搬数据前台立刻卡顿。两端之间存在巨大的调度真空，必须由我们自研这套软件来做语义翻译和动态调度。</a:t>
+              <a:t>评委之前问：为什么不能在 vLLM 里加两行代码直接调 KPCL？或者让 KPCL 团队把事情全做了？这页从计算机软件分层的角度给出了清晰答案。vLLM 是面向 Python 开发者的计算引擎，它眼里的世界是 Token、张量和计算图，根本没有硬件拓扑和微秒流控的概念；而 KPCL 是底层通信驱动，它眼里的世界是内存地址和 QP 队列，根本不知道哪一层是正在急等数据的关键算子。两端之间存在系统级的认知断层。自研软件的作用就是充当‘语义编译器’与‘流控调度器’，把上层 80 层计算语义翻译成下层微秒级 DMA 指令。没有这层软件，硬件潜能根本释放不出来。</a:t>
             </a:r>
           </a:p>
         </p:txBody>
@@ -1359,7 +1359,7 @@
           <a:lstStyle/>
           <a:p>
             <a:r>
-              <a:t>这页用体系结构的第一性原理，把 TTFT 的关键执行路径彻底拆开。大家看图中的标注：18 微秒是微基准实测值；220 毫秒是 70B 算力假设值；0.31 毫秒是流水掩盖后的暴露推导值；而最终的 220.89 毫秒是一个严格由 DAG 方程算出来的模型推导值，绝不是硬件实测。在 70B 模型下，8K 后缀计算需要 220 毫秒，这是物理算力必须花的时间；而拉取 8K 前缀对应单卡 320MB 数据。如果按照开源的串行拉取，网络传输要等 24 毫秒以上。自研软件的核心使命，就是把这 24 毫秒从关键路径上抹掉，只留下一层启动的 0.31 毫秒。</a:t>
+              <a:t>在展开论证之前，必须客观呈现端到端首字生成的完整关键路径。一个典型的 16K 请求命中 8K 前缀，完全本地重算需要 420 毫秒。如果复用缓存，虽然算力上能省下 200 毫秒，但在关键路径上引入了新的开销：排队、哈希查询、决策、描述符编译、正文传输和多卡同步。实测哈希查询确实只要 18 微秒，但大家一眼就能看出：在 200 多毫秒的整体大盘里，18 微秒哪怕提速一万倍，对端到端也毫无感知。真正的性能大头是 320MB 的数据搬运，串行拉取要耗费 24 毫秒。不把这 24 毫秒解决掉，根本不可能兑现 20% 以上的整机收益。</a:t>
             </a:r>
           </a:p>
         </p:txBody>
@@ -1429,7 +1429,7 @@
           <a:lstStyle/>
           <a:p>
             <a:r>
-              <a:t>评委之前问得非常犀利：查询从 28 微秒降到 18 微秒，只快了 10 微秒，在 250 毫秒的请求里连万分之一都不到，凭什么说能让整机快 20%？我们必须诚实承认：单靠查询加速 10 微秒，对整机性能没有任何实质帮助。那为什么还要把控制面做到微秒级？因为开源方案的控制面太慢了，TCP 查询加上 CPU 拷贝要 21 毫秒，导致前缀小于 850 个 Token 时，去拉缓存反而比重新计算还慢，业务根本不敢开复用。自研软件把控制面压到 0.5 毫秒，只要前缀有 20 个 Token 就能稳赚不赔，把加速覆盖范围扩大了 40 倍。</a:t>
+              <a:t>评委之前问：查询从 28 微秒降到 18 微秒，只快了 10 微秒，在 250 毫秒的请求里连万分之一都不到，凭什么说能让整机快 20%？我们必须诚实承认：单靠查询加速 10 微秒，对整机性能没有任何实质帮助。那为什么还要把控制面做到微秒级？因为开源方案的控制面太慢了，TCP 查询加上 CPU 拷贝要 21 毫秒，导致前缀小于 850 个 Token 时，去拉缓存反而比重新计算还慢，业务根本不敢开复用。自研软件把控制面压到 0.5 毫秒，只要前缀有 20 个 Token 就能稳赚不赔，把加速覆盖范围扩大了 40 倍。</a:t>
             </a:r>
           </a:p>
         </p:txBody>
@@ -4997,9 +4997,9 @@
           <a:p>
             <a:pPr>
               <a:spcAft>
-                <a:spcPts val="1000"/>
-              </a:spcAft>
-              <a:defRPr sz="1650" b="1">
+                <a:spcPts val="800"/>
+              </a:spcAft>
+              <a:defRPr sz="1550" b="1">
                 <a:solidFill>
                   <a:srgbClr val="1D4ED8"/>
                 </a:solidFill>
@@ -5013,9 +5013,9 @@
           <a:p>
             <a:pPr>
               <a:lnSpc>
-                <a:spcPct val="128000"/>
+                <a:spcPct val="122000"/>
               </a:lnSpc>
-              <a:defRPr sz="1200">
+              <a:defRPr sz="1140">
                 <a:solidFill>
                   <a:srgbClr val="0F172A"/>
                 </a:solidFill>
@@ -5099,9 +5099,9 @@
           <a:p>
             <a:pPr>
               <a:spcAft>
-                <a:spcPts val="1000"/>
-              </a:spcAft>
-              <a:defRPr sz="1650" b="1">
+                <a:spcPts val="800"/>
+              </a:spcAft>
+              <a:defRPr sz="1550" b="1">
                 <a:solidFill>
                   <a:srgbClr val="047857"/>
                 </a:solidFill>
@@ -5115,9 +5115,9 @@
           <a:p>
             <a:pPr>
               <a:lnSpc>
-                <a:spcPct val="128000"/>
+                <a:spcPct val="122000"/>
               </a:lnSpc>
-              <a:defRPr sz="1200">
+              <a:defRPr sz="1140">
                 <a:solidFill>
                   <a:srgbClr val="0F172A"/>
                 </a:solidFill>
@@ -5125,7 +5125,7 @@
               </a:defRPr>
             </a:pPr>
             <a:r>
-              <a:t>基于 70B 模型常数推导：逐层流水掩盖 98.7% 传输 [推导]，步频退避将干扰降至 1.57% [推导]，令牌桶消除 Incast 丢包 [推导]。</a:t>
+              <a:t>70B 关键路径推导：逐层流水掩盖 98.7% 传输，步频退避控制干扰在 1.57%，端侧整形消除 Incast [推导值]。</a:t>
             </a:r>
           </a:p>
         </p:txBody>
@@ -5201,9 +5201,9 @@
           <a:p>
             <a:pPr>
               <a:spcAft>
-                <a:spcPts val="1000"/>
-              </a:spcAft>
-              <a:defRPr sz="1650" b="1">
+                <a:spcPts val="800"/>
+              </a:spcAft>
+              <a:defRPr sz="1550" b="1">
                 <a:solidFill>
                   <a:srgbClr val="B45309"/>
                 </a:solidFill>
@@ -5217,9 +5217,9 @@
           <a:p>
             <a:pPr>
               <a:lnSpc>
-                <a:spcPct val="128000"/>
+                <a:spcPct val="122000"/>
               </a:lnSpc>
-              <a:defRPr sz="1200">
+              <a:defRPr sz="1140">
                 <a:solidFill>
                   <a:srgbClr val="0F172A"/>
                 </a:solidFill>
@@ -5387,7 +5387,7 @@
                 </a:solidFill>
                 <a:latin typeface="Microsoft YaHei"/>
               </a:rPr>
-              <a:t>核心使命：</a:t>
+              <a:t>立项使命：</a:t>
             </a:r>
             <a:r>
               <a:rPr sz="1300">
@@ -7961,7 +7961,7 @@
                         </a:defRPr>
                       </a:pPr>
                       <a:r>
-                        <a:t>32.4 ms [模型推导值] (整组步调齐头并进)</a:t>
+                        <a:t>32.4 ms [模型推导值] (整组齐头并进)</a:t>
                       </a:r>
                     </a:p>
                   </a:txBody>
@@ -8619,7 +8619,7 @@
               </a:defRPr>
             </a:pPr>
             <a:r>
-              <a:t>全概率分布模型：F_T(t) = h · F_h(t) + (1 − h) · F_m(t) [统计数学模型]：</a:t>
+              <a:t>全概率分布模型 [统计数学模型]：F_T(t) = h · F_h(t) + (1 − h) · F_m(t)</a:t>
             </a:r>
           </a:p>
           <a:p>
@@ -10530,10 +10530,10 @@
                 <a:tableStyleId>{5C22544A-7EE6-4342-B048-85BDC9FD1C3A}</a:tableStyleId>
               </a:tblPr>
               <a:tblGrid>
-                <a:gridCol w="1828800"/>
-                <a:gridCol w="2011680"/>
-                <a:gridCol w="3291840"/>
-                <a:gridCol w="3962095"/>
+                <a:gridCol w="1691640"/>
+                <a:gridCol w="1783080"/>
+                <a:gridCol w="3703320"/>
+                <a:gridCol w="3916375"/>
               </a:tblGrid>
               <a:tr h="462280">
                 <a:tc>
@@ -10550,7 +10550,7 @@
                         </a:defRPr>
                       </a:pPr>
                       <a:r>
-                        <a:t>通信模式编号与名称</a:t>
+                        <a:t>通信模式与编号</a:t>
                       </a:r>
                     </a:p>
                   </a:txBody>
@@ -10574,7 +10574,7 @@
                         </a:defRPr>
                       </a:pPr>
                       <a:r>
-                        <a:t>大模型真实触发场景</a:t>
+                        <a:t>真实触发场景</a:t>
                       </a:r>
                     </a:p>
                   </a:txBody>
@@ -10622,7 +10622,7 @@
                         </a:defRPr>
                       </a:pPr>
                       <a:r>
-                        <a:t>向底层提炼的核心诉求与催熟的关键技术 [契约目标]</a:t>
+                        <a:t>提炼核心诉求与催熟技术 [契约目标]</a:t>
                       </a:r>
                     </a:p>
                   </a:txBody>
@@ -10640,7 +10640,7 @@
                     <a:lstStyle/>
                     <a:p>
                       <a:pPr algn="ctr">
-                        <a:defRPr sz="1050" b="1">
+                        <a:defRPr sz="980" b="1">
                           <a:solidFill>
                             <a:srgbClr val="0F172A"/>
                           </a:solidFill>
@@ -10664,7 +10664,7 @@
                     <a:lstStyle/>
                     <a:p>
                       <a:pPr algn="l">
-                        <a:defRPr sz="1050">
+                        <a:defRPr sz="980">
                           <a:solidFill>
                             <a:srgbClr val="0F172A"/>
                           </a:solidFill>
@@ -10688,7 +10688,7 @@
                     <a:lstStyle/>
                     <a:p>
                       <a:pPr algn="l">
-                        <a:defRPr sz="1050">
+                        <a:defRPr sz="980">
                           <a:solidFill>
                             <a:srgbClr val="0F172A"/>
                           </a:solidFill>
@@ -10696,7 +10696,7 @@
                         </a:defRPr>
                       </a:pPr>
                       <a:r>
-                        <a:t>极高频，包长极小 (64B~4KB) [画像]，要求 P99 &lt; 5µs [目标值]</a:t>
+                        <a:t>极高频，包长极小 (64B~4KB) [画像]，P99 &lt; 5µs [目标值]</a:t>
                       </a:r>
                     </a:p>
                   </a:txBody>
@@ -10712,7 +10712,7 @@
                     <a:lstStyle/>
                     <a:p>
                       <a:pPr algn="l">
-                        <a:defRPr sz="1050">
+                        <a:defRPr sz="980">
                           <a:solidFill>
                             <a:srgbClr val="0F172A"/>
                           </a:solidFill>
@@ -10738,7 +10738,7 @@
                     <a:lstStyle/>
                     <a:p>
                       <a:pPr algn="ctr">
-                        <a:defRPr sz="1050" b="1">
+                        <a:defRPr sz="980" b="1">
                           <a:solidFill>
                             <a:srgbClr val="0F172A"/>
                           </a:solidFill>
@@ -10762,7 +10762,7 @@
                     <a:lstStyle/>
                     <a:p>
                       <a:pPr algn="l">
-                        <a:defRPr sz="1050">
+                        <a:defRPr sz="980">
                           <a:solidFill>
                             <a:srgbClr val="0F172A"/>
                           </a:solidFill>
@@ -10786,7 +10786,7 @@
                     <a:lstStyle/>
                     <a:p>
                       <a:pPr algn="l">
-                        <a:defRPr sz="1050">
+                        <a:defRPr sz="980">
                           <a:solidFill>
                             <a:srgbClr val="0F172A"/>
                           </a:solidFill>
@@ -10794,7 +10794,7 @@
                         </a:defRPr>
                       </a:pPr>
                       <a:r>
-                        <a:t>中大包 (4MB~16MB) [画像]，吞吐受限，单卡需跑满 20GB/s [标称目标]</a:t>
+                        <a:t>中大包 (4MB~16MB) [画像]，单卡跑满 20GB/s [标称目标]</a:t>
                       </a:r>
                     </a:p>
                   </a:txBody>
@@ -10810,7 +10810,7 @@
                     <a:lstStyle/>
                     <a:p>
                       <a:pPr algn="l">
-                        <a:defRPr sz="1050">
+                        <a:defRPr sz="980">
                           <a:solidFill>
                             <a:srgbClr val="0F172A"/>
                           </a:solidFill>
@@ -10818,7 +10818,7 @@
                         </a:defRPr>
                       </a:pPr>
                       <a:r>
-                        <a:t>支持连续物理块描述符批量提交 ➔ 催熟硬件 SGL 描述符编译与 DMA 直达</a:t>
+                        <a:t>支持连续物理块批量提交 ➔ 催熟硬件 SGL 描述符编译与 DMA 直达</a:t>
                       </a:r>
                     </a:p>
                   </a:txBody>
@@ -10836,7 +10836,7 @@
                     <a:lstStyle/>
                     <a:p>
                       <a:pPr algn="ctr">
-                        <a:defRPr sz="1050" b="1">
+                        <a:defRPr sz="980" b="1">
                           <a:solidFill>
                             <a:srgbClr val="0F172A"/>
                           </a:solidFill>
@@ -10860,7 +10860,7 @@
                     <a:lstStyle/>
                     <a:p>
                       <a:pPr algn="l">
-                        <a:defRPr sz="1050">
+                        <a:defRPr sz="980">
                           <a:solidFill>
                             <a:srgbClr val="0F172A"/>
                           </a:solidFill>
@@ -10884,7 +10884,7 @@
                     <a:lstStyle/>
                     <a:p>
                       <a:pPr algn="l">
-                        <a:defRPr sz="1050">
+                        <a:defRPr sz="980">
                           <a:solidFill>
                             <a:srgbClr val="0F172A"/>
                           </a:solidFill>
@@ -10892,7 +10892,7 @@
                         </a:defRPr>
                       </a:pPr>
                       <a:r>
-                        <a:t>80 层微时序，每层 4MB，每隔 2.75ms 突发一次 [物理常数/时序推导]</a:t>
+                        <a:t>80 层微时序，每层 4MB，每隔 2.75ms 突发 [时序推导]</a:t>
                       </a:r>
                     </a:p>
                   </a:txBody>
@@ -10908,7 +10908,7 @@
                     <a:lstStyle/>
                     <a:p>
                       <a:pPr algn="l">
-                        <a:defRPr sz="1050">
+                        <a:defRPr sz="980">
                           <a:solidFill>
                             <a:srgbClr val="0F172A"/>
                           </a:solidFill>
@@ -10934,7 +10934,7 @@
                     <a:lstStyle/>
                     <a:p>
                       <a:pPr algn="ctr">
-                        <a:defRPr sz="1050" b="1">
+                        <a:defRPr sz="980" b="1">
                           <a:solidFill>
                             <a:srgbClr val="0F172A"/>
                           </a:solidFill>
@@ -10958,7 +10958,7 @@
                     <a:lstStyle/>
                     <a:p>
                       <a:pPr algn="l">
-                        <a:defRPr sz="1050">
+                        <a:defRPr sz="980">
                           <a:solidFill>
                             <a:srgbClr val="0F172A"/>
                           </a:solidFill>
@@ -10982,7 +10982,7 @@
                     <a:lstStyle/>
                     <a:p>
                       <a:pPr algn="l">
-                        <a:defRPr sz="1050">
+                        <a:defRPr sz="980">
                           <a:solidFill>
                             <a:srgbClr val="0F172A"/>
                           </a:solidFill>
@@ -10990,7 +10990,7 @@
                         </a:defRPr>
                       </a:pPr>
                       <a:r>
-                        <a:t>8 卡关联流同时启动、同时到达，偏斜比要求 &lt; 1.15 [约束目标]</a:t>
+                        <a:t>8 卡关联流同时启动到达，偏斜比 &lt; 1.15 [约束目标]</a:t>
                       </a:r>
                     </a:p>
                   </a:txBody>
@@ -11006,7 +11006,7 @@
                     <a:lstStyle/>
                     <a:p>
                       <a:pPr algn="l">
-                        <a:defRPr sz="1050">
+                        <a:defRPr sz="980">
                           <a:solidFill>
                             <a:srgbClr val="0F172A"/>
                           </a:solidFill>
@@ -11014,7 +11014,7 @@
                         </a:defRPr>
                       </a:pPr>
                       <a:r>
-                        <a:t>多卡协同门铃与完成状态原子聚合 ➔ 催熟 Coflow 协同流控与防悬挂屏障</a:t>
+                        <a:t>多卡协同门铃与完成聚合 ➔ 催熟 Coflow 协同流控与防挂屏障</a:t>
                       </a:r>
                     </a:p>
                   </a:txBody>
@@ -11032,7 +11032,7 @@
                     <a:lstStyle/>
                     <a:p>
                       <a:pPr algn="ctr">
-                        <a:defRPr sz="1050" b="1">
+                        <a:defRPr sz="980" b="1">
                           <a:solidFill>
                             <a:srgbClr val="0F172A"/>
                           </a:solidFill>
@@ -11056,7 +11056,7 @@
                     <a:lstStyle/>
                     <a:p>
                       <a:pPr algn="l">
-                        <a:defRPr sz="1050">
+                        <a:defRPr sz="980">
                           <a:solidFill>
                             <a:srgbClr val="0F172A"/>
                           </a:solidFill>
@@ -11080,7 +11080,7 @@
                     <a:lstStyle/>
                     <a:p>
                       <a:pPr algn="l">
-                        <a:defRPr sz="1050">
+                        <a:defRPr sz="980">
                           <a:solidFill>
                             <a:srgbClr val="0F172A"/>
                           </a:solidFill>
@@ -11088,7 +11088,7 @@
                         </a:defRPr>
                       </a:pPr>
                       <a:r>
-                        <a:t>高优极短流与大吞吐背景流长时间深度交织 [业务场景]</a:t>
+                        <a:t>高优短流与大吞吐背景流长时间交织 [业务场景]</a:t>
                       </a:r>
                     </a:p>
                   </a:txBody>
@@ -11104,7 +11104,7 @@
                     <a:lstStyle/>
                     <a:p>
                       <a:pPr algn="l">
-                        <a:defRPr sz="1050">
+                        <a:defRPr sz="980">
                           <a:solidFill>
                             <a:srgbClr val="0F172A"/>
                           </a:solidFill>
@@ -11112,7 +11112,7 @@
                         </a:defRPr>
                       </a:pPr>
                       <a:r>
-                        <a:t>DSCP/CoS 硬件优先级映射 (TC0/TC1) ➔ 催熟微秒级反压与显存流控机制</a:t>
+                        <a:t>硬件优先级映射 (TC0/TC1) ➔ 催熟微秒级反压与显存流控机制</a:t>
                       </a:r>
                     </a:p>
                   </a:txBody>
@@ -11130,7 +11130,7 @@
                     <a:lstStyle/>
                     <a:p>
                       <a:pPr algn="ctr">
-                        <a:defRPr sz="1050" b="1">
+                        <a:defRPr sz="980" b="1">
                           <a:solidFill>
                             <a:srgbClr val="0F172A"/>
                           </a:solidFill>
@@ -11154,7 +11154,7 @@
                     <a:lstStyle/>
                     <a:p>
                       <a:pPr algn="l">
-                        <a:defRPr sz="1050">
+                        <a:defRPr sz="980">
                           <a:solidFill>
                             <a:srgbClr val="0F172A"/>
                           </a:solidFill>
@@ -11178,7 +11178,7 @@
                     <a:lstStyle/>
                     <a:p>
                       <a:pPr algn="l">
-                        <a:defRPr sz="1050">
+                        <a:defRPr sz="980">
                           <a:solidFill>
                             <a:srgbClr val="0F172A"/>
                           </a:solidFill>
@@ -11186,7 +11186,7 @@
                         </a:defRPr>
                       </a:pPr>
                       <a:r>
-                        <a:t>16 并发以上汇聚，瞬时突发 512MB 冲击浅缓冲 [负载假设]</a:t>
+                        <a:t>16 并发汇聚，瞬时突发 512MB 冲击浅缓冲 [负载假设]</a:t>
                       </a:r>
                     </a:p>
                   </a:txBody>
@@ -11202,7 +11202,7 @@
                     <a:lstStyle/>
                     <a:p>
                       <a:pPr algn="l">
-                        <a:defRPr sz="1050">
+                        <a:defRPr sz="980">
                           <a:solidFill>
                             <a:srgbClr val="0F172A"/>
                           </a:solidFill>
@@ -11210,7 +11210,7 @@
                         </a:defRPr>
                       </a:pPr>
                       <a:r>
-                        <a:t>基于 RTT 的拥塞通知与端侧突发整形 ➔ 催熟动态拥塞控制算法 (DCQCN/URMA)</a:t>
+                        <a:t>基于 RTT 拥塞通知与端侧突发整形 ➔ 催熟动态拥塞算法 (DCQCN)</a:t>
                       </a:r>
                     </a:p>
                   </a:txBody>
@@ -11228,7 +11228,7 @@
                     <a:lstStyle/>
                     <a:p>
                       <a:pPr algn="ctr">
-                        <a:defRPr sz="1050" b="1">
+                        <a:defRPr sz="980" b="1">
                           <a:solidFill>
                             <a:srgbClr val="0F172A"/>
                           </a:solidFill>
@@ -11252,7 +11252,7 @@
                     <a:lstStyle/>
                     <a:p>
                       <a:pPr algn="l">
-                        <a:defRPr sz="1050">
+                        <a:defRPr sz="980">
                           <a:solidFill>
                             <a:srgbClr val="0F172A"/>
                           </a:solidFill>
@@ -11276,7 +11276,7 @@
                     <a:lstStyle/>
                     <a:p>
                       <a:pPr algn="l">
-                        <a:defRPr sz="1050">
+                        <a:defRPr sz="980">
                           <a:solidFill>
                             <a:srgbClr val="0F172A"/>
                           </a:solidFill>
@@ -11284,7 +11284,7 @@
                         </a:defRPr>
                       </a:pPr>
                       <a:r>
-                        <a:t>1 个源向 N 个实例同时分发相同的万 Token 缓存 [典型负载]</a:t>
+                        <a:t>1 源向 N 实例分发相同万 Token 缓存 [典型负载]</a:t>
                       </a:r>
                     </a:p>
                   </a:txBody>
@@ -11300,7 +11300,7 @@
                     <a:lstStyle/>
                     <a:p>
                       <a:pPr algn="l">
-                        <a:defRPr sz="1050">
+                        <a:defRPr sz="980">
                           <a:solidFill>
                             <a:srgbClr val="0F172A"/>
                           </a:solidFill>
@@ -11308,7 +11308,7 @@
                         </a:defRPr>
                       </a:pPr>
                       <a:r>
-                        <a:t>优先硬件组播，次选高效树状中继 ➔ 催熟底层多播驱动与跨节点级联直通</a:t>
+                        <a:t>优先硬件组播，次选树状中继 ➔ 催熟底层多播驱动与跨节点级联直通</a:t>
                       </a:r>
                     </a:p>
                   </a:txBody>
@@ -11326,7 +11326,7 @@
                     <a:lstStyle/>
                     <a:p>
                       <a:pPr algn="ctr">
-                        <a:defRPr sz="1050" b="1">
+                        <a:defRPr sz="980" b="1">
                           <a:solidFill>
                             <a:srgbClr val="0F172A"/>
                           </a:solidFill>
@@ -11350,7 +11350,7 @@
                     <a:lstStyle/>
                     <a:p>
                       <a:pPr algn="l">
-                        <a:defRPr sz="1050">
+                        <a:defRPr sz="980">
                           <a:solidFill>
                             <a:srgbClr val="0F172A"/>
                           </a:solidFill>
@@ -11374,7 +11374,7 @@
                     <a:lstStyle/>
                     <a:p>
                       <a:pPr algn="l">
-                        <a:defRPr sz="1050">
+                        <a:defRPr sz="980">
                           <a:solidFill>
                             <a:srgbClr val="0F172A"/>
                           </a:solidFill>
@@ -11382,7 +11382,7 @@
                         </a:defRPr>
                       </a:pPr>
                       <a:r>
-                        <a:t>偶发异常，要求在 &lt; 500µs [协议目标] 内完成在途传输取消</a:t>
+                        <a:t>偶发异常，要求在 &lt; 500µs [目标值] 内完成在途撤销</a:t>
                       </a:r>
                     </a:p>
                   </a:txBody>
@@ -11398,7 +11398,7 @@
                     <a:lstStyle/>
                     <a:p>
                       <a:pPr algn="l">
-                        <a:defRPr sz="1050">
+                        <a:defRPr sz="980">
                           <a:solidFill>
                             <a:srgbClr val="0F172A"/>
                           </a:solidFill>
@@ -11406,7 +11406,7 @@
                         </a:defRPr>
                       </a:pPr>
                       <a:r>
-                        <a:t>微秒级异步任务撤销与描述符排空 ➔ 催熟通信上下文快速重置与免死锁回收</a:t>
+                        <a:t>微秒级异步任务撤销与描述符排空 ➔ 催熟通信上下文快速重置与回收</a:t>
                       </a:r>
                     </a:p>
                   </a:txBody>
@@ -11836,7 +11836,7 @@
               <a:spcAft>
                 <a:spcPts val="250"/>
               </a:spcAft>
-              <a:defRPr sz="1120" b="1">
+              <a:defRPr sz="1080" b="1">
                 <a:solidFill>
                   <a:srgbClr val="1E3A8A"/>
                 </a:solidFill>
@@ -11844,7 +11844,7 @@
               </a:defRPr>
             </a:pPr>
             <a:r>
-              <a:t>J_i = (a_i, d_i, group_i, pred_i, src_i, dst_i, V_i, E_i, visible_i, fail_i) [设计契约]</a:t>
+              <a:t>J_i = (a_i, d_i, group_i, pred_i, src_i, dst_i, V_i, E_i, visible_i, fail_i)</a:t>
             </a:r>
           </a:p>
           <a:p>
@@ -12114,7 +12114,7 @@
               </a:spcAft>
               <a:defRPr sz="1550" b="1">
                 <a:solidFill>
-                  <a:srgbClr val="1D4ED8"/>
+                  <a:srgbClr val="1E3A8A"/>
                 </a:solidFill>
                 <a:latin typeface="Microsoft YaHei"/>
               </a:defRPr>
@@ -12126,12 +12126,31 @@
           <a:p>
             <a:pPr>
               <a:lnSpc>
-                <a:spcPct val="122000"/>
+                <a:spcPct val="120000"/>
               </a:lnSpc>
               <a:spcAft>
-                <a:spcPts val="400"/>
-              </a:spcAft>
-              <a:defRPr sz="1140" b="1">
+                <a:spcPts val="250"/>
+              </a:spcAft>
+              <a:defRPr sz="1100" b="1">
+                <a:solidFill>
+                  <a:srgbClr val="1E3A8A"/>
+                </a:solidFill>
+                <a:latin typeface="Microsoft YaHei"/>
+              </a:defRPr>
+            </a:pPr>
+            <a:r>
+              <a:t>标准接口契约文本表达：</a:t>
+            </a:r>
+          </a:p>
+          <a:p>
+            <a:pPr>
+              <a:lnSpc>
+                <a:spcPct val="120000"/>
+              </a:lnSpc>
+              <a:spcAft>
+                <a:spcPts val="250"/>
+              </a:spcAft>
+              <a:defRPr sz="1100" b="0">
                 <a:solidFill>
                   <a:srgbClr val="0F172A"/>
                 </a:solidFill>
@@ -12139,18 +12158,37 @@
               </a:defRPr>
             </a:pPr>
             <a:r>
-              <a:t>标准接口契约文本表达：</a:t>
+              <a:t>  “在指定源目标、分段大小、并发组与设备可见性定义下，任务获得不低于 R 的有效带宽、最大排队延迟不高于 θ，允许突发不超过 σ，并严格按任务时限 d_i 报告完成或失败。” [形式化契约定义]</a:t>
             </a:r>
           </a:p>
           <a:p>
             <a:pPr>
               <a:lnSpc>
-                <a:spcPct val="122000"/>
+                <a:spcPct val="120000"/>
               </a:lnSpc>
               <a:spcAft>
-                <a:spcPts val="400"/>
-              </a:spcAft>
-              <a:defRPr sz="1140" b="0">
+                <a:spcPts val="250"/>
+              </a:spcAft>
+              <a:defRPr sz="1100" b="1">
+                <a:solidFill>
+                  <a:srgbClr val="1E3A8A"/>
+                </a:solidFill>
+                <a:latin typeface="Microsoft YaHei"/>
+              </a:defRPr>
+            </a:pPr>
+            <a:r>
+              <a:t>明确双方工程职责边界：</a:t>
+            </a:r>
+          </a:p>
+          <a:p>
+            <a:pPr>
+              <a:lnSpc>
+                <a:spcPct val="120000"/>
+              </a:lnSpc>
+              <a:spcAft>
+                <a:spcPts val="250"/>
+              </a:spcAft>
+              <a:defRPr sz="1100" b="0">
                 <a:solidFill>
                   <a:srgbClr val="0F172A"/>
                 </a:solidFill>
@@ -12158,18 +12196,18 @@
               </a:defRPr>
             </a:pPr>
             <a:r>
-              <a:t>  “在指定源目标、分段大小、并发组与设备可见性定义下，任务获得不低于 R 的有效带宽、最大排队延迟不高于 θ，允许突发不超过 σ，并严格按任务时限 d_i 报告完成或失败。” [形式化契约定义]</a:t>
+              <a:t>  • 自研 KVC 职责：负责哈希检索、选路决策、流量整形与异常回退；</a:t>
             </a:r>
           </a:p>
           <a:p>
             <a:pPr>
               <a:lnSpc>
-                <a:spcPct val="122000"/>
+                <a:spcPct val="120000"/>
               </a:lnSpc>
               <a:spcAft>
-                <a:spcPts val="400"/>
-              </a:spcAft>
-              <a:defRPr sz="1140" b="1">
+                <a:spcPts val="250"/>
+              </a:spcAft>
+              <a:defRPr sz="1100" b="0">
                 <a:solidFill>
                   <a:srgbClr val="0F172A"/>
                 </a:solidFill>
@@ -12177,58 +12215,20 @@
               </a:defRPr>
             </a:pPr>
             <a:r>
-              <a:t>明确双方工程职责边界：</a:t>
+              <a:t>  • KPCL 底座职责：负责用户态无锁提交、硬件 DMA 直达与队列映射；</a:t>
             </a:r>
           </a:p>
           <a:p>
             <a:pPr>
               <a:lnSpc>
-                <a:spcPct val="122000"/>
+                <a:spcPct val="120000"/>
               </a:lnSpc>
               <a:spcAft>
-                <a:spcPts val="400"/>
-              </a:spcAft>
-              <a:defRPr sz="1140" b="0">
-                <a:solidFill>
-                  <a:srgbClr val="0F172A"/>
-                </a:solidFill>
-                <a:latin typeface="Microsoft YaHei"/>
-              </a:defRPr>
-            </a:pPr>
-            <a:r>
-              <a:t>  • 自研 KVC 职责：负责哈希检索、选路决策、流量整形与异常回退；</a:t>
-            </a:r>
-          </a:p>
-          <a:p>
-            <a:pPr>
-              <a:lnSpc>
-                <a:spcPct val="122000"/>
-              </a:lnSpc>
-              <a:spcAft>
-                <a:spcPts val="400"/>
-              </a:spcAft>
-              <a:defRPr sz="1140" b="0">
-                <a:solidFill>
-                  <a:srgbClr val="0F172A"/>
-                </a:solidFill>
-                <a:latin typeface="Microsoft YaHei"/>
-              </a:defRPr>
-            </a:pPr>
-            <a:r>
-              <a:t>  • KPCL 底座职责：负责用户态无锁提交、硬件 DMA 直达与队列映射；</a:t>
-            </a:r>
-          </a:p>
-          <a:p>
-            <a:pPr>
-              <a:lnSpc>
-                <a:spcPct val="122000"/>
-              </a:lnSpc>
-              <a:spcAft>
-                <a:spcPts val="400"/>
-              </a:spcAft>
-              <a:defRPr sz="1140" b="0">
-                <a:solidFill>
-                  <a:srgbClr val="0F172A"/>
+                <a:spcPts val="250"/>
+              </a:spcAft>
+              <a:defRPr sz="1100" b="1">
+                <a:solidFill>
+                  <a:srgbClr val="1E3A8A"/>
                 </a:solidFill>
                 <a:latin typeface="Microsoft YaHei"/>
               </a:defRPr>
@@ -12654,7 +12654,7 @@
         <p:spPr>
           <a:xfrm>
             <a:off x="548640" y="1115568"/>
-            <a:ext cx="2651760" cy="3566160"/>
+            <a:ext cx="2670048" cy="3566160"/>
           </a:xfrm>
           <a:prstGeom prst="roundRect">
             <a:avLst>
@@ -12700,8 +12700,8 @@
         </p:nvSpPr>
         <p:spPr>
           <a:xfrm>
-            <a:off x="621792" y="1207008"/>
-            <a:ext cx="2505456" cy="3383280"/>
+            <a:off x="603504" y="1207008"/>
+            <a:ext cx="2560320" cy="3383280"/>
           </a:xfrm>
           <a:prstGeom prst="rect">
             <a:avLst/>
@@ -12734,7 +12734,7 @@
               <a:spcAft>
                 <a:spcPts val="800"/>
               </a:spcAft>
-              <a:defRPr sz="1120" b="1">
+              <a:defRPr sz="1100" b="1">
                 <a:solidFill>
                   <a:srgbClr val="0F172A"/>
                 </a:solidFill>
@@ -12742,7 +12742,7 @@
               </a:defRPr>
             </a:pPr>
             <a:r>
-              <a:t>PVT-00 业务复用评估 [业务前提验证]</a:t>
+              <a:t>PVT-00 业务复用评估 [前提验证]</a:t>
             </a:r>
           </a:p>
           <a:p>
@@ -12753,7 +12753,7 @@
               <a:spcAft>
                 <a:spcPts val="400"/>
               </a:spcAft>
-              <a:defRPr sz="1080">
+              <a:defRPr sz="960">
                 <a:solidFill>
                   <a:srgbClr val="0F172A"/>
                 </a:solidFill>
@@ -12761,7 +12761,7 @@
               </a:defRPr>
             </a:pPr>
             <a:r>
-              <a:t>• 测定生产命中率与自然前缀分布 [实测目标]</a:t>
+              <a:t>• [实测] 测定生产命中率与前缀分布</a:t>
             </a:r>
           </a:p>
           <a:p>
@@ -12772,7 +12772,7 @@
               <a:spcAft>
                 <a:spcPts val="400"/>
               </a:spcAft>
-              <a:defRPr sz="1080">
+              <a:defRPr sz="960">
                 <a:solidFill>
                   <a:srgbClr val="0F172A"/>
                 </a:solidFill>
@@ -12780,7 +12780,7 @@
               </a:defRPr>
             </a:pPr>
             <a:r>
-              <a:t>• 探明 Saved-Prefill 节省物理上限 [实测目标]</a:t>
+              <a:t>• [实测] 探明 Saved-Prefill 物理上限</a:t>
             </a:r>
           </a:p>
           <a:p>
@@ -12791,7 +12791,7 @@
               <a:spcAft>
                 <a:spcPts val="400"/>
               </a:spcAft>
-              <a:defRPr sz="1080">
+              <a:defRPr sz="960">
                 <a:solidFill>
                   <a:srgbClr val="0F172A"/>
                 </a:solidFill>
@@ -12799,7 +12799,7 @@
               </a:defRPr>
             </a:pPr>
             <a:r>
-              <a:t>• 测定 URMA 单请求查询时延极限 [实测目标]</a:t>
+              <a:t>• [实测] 测定 URMA 单请求时延极限</a:t>
             </a:r>
           </a:p>
           <a:p>
@@ -12810,7 +12810,7 @@
               <a:spcAft>
                 <a:spcPts val="400"/>
               </a:spcAft>
-              <a:defRPr sz="1080">
+              <a:defRPr sz="960">
                 <a:solidFill>
                   <a:srgbClr val="0F172A"/>
                 </a:solidFill>
@@ -12818,7 +12818,7 @@
               </a:defRPr>
             </a:pPr>
             <a:r>
-              <a:t>• 对应模型：收敛 α 与 f 真实参数 [闭环验证]</a:t>
+              <a:t>• [收敛] 理论模型参数 α 与 f 实测收敛</a:t>
             </a:r>
           </a:p>
         </p:txBody>
@@ -12832,7 +12832,7 @@
         <p:spPr>
           <a:xfrm>
             <a:off x="3364992" y="1115568"/>
-            <a:ext cx="2651760" cy="3566160"/>
+            <a:ext cx="2670048" cy="3566160"/>
           </a:xfrm>
           <a:prstGeom prst="roundRect">
             <a:avLst>
@@ -12878,8 +12878,8 @@
         </p:nvSpPr>
         <p:spPr>
           <a:xfrm>
-            <a:off x="3438144" y="1207008"/>
-            <a:ext cx="2505456" cy="3383280"/>
+            <a:off x="3419856" y="1207008"/>
+            <a:ext cx="2560320" cy="3383280"/>
           </a:xfrm>
           <a:prstGeom prst="rect">
             <a:avLst/>
@@ -12912,7 +12912,7 @@
               <a:spcAft>
                 <a:spcPts val="800"/>
               </a:spcAft>
-              <a:defRPr sz="1120" b="1">
+              <a:defRPr sz="1100" b="1">
                 <a:solidFill>
                   <a:srgbClr val="0F172A"/>
                 </a:solidFill>
@@ -12920,7 +12920,7 @@
               </a:defRPr>
             </a:pPr>
             <a:r>
-              <a:t>PVT-01, 02, 06 [底座打通目标]</a:t>
+              <a:t>PVT-01, 02, 06 [底座打通]</a:t>
             </a:r>
           </a:p>
           <a:p>
@@ -12931,7 +12931,7 @@
               <a:spcAft>
                 <a:spcPts val="400"/>
               </a:spcAft>
-              <a:defRPr sz="1080">
+              <a:defRPr sz="960">
                 <a:solidFill>
                   <a:srgbClr val="0F172A"/>
                 </a:solidFill>
@@ -12939,7 +12939,7 @@
               </a:defRPr>
             </a:pPr>
             <a:r>
-              <a:t>• PVT-01: 验证零拷贝底座物理带宽 [实测目标]</a:t>
+              <a:t>• [实测] 验证零拷贝物理带宽 (PVT-01)</a:t>
             </a:r>
           </a:p>
           <a:p>
@@ -12950,7 +12950,7 @@
               <a:spcAft>
                 <a:spcPts val="400"/>
               </a:spcAft>
-              <a:defRPr sz="1080">
+              <a:defRPr sz="960">
                 <a:solidFill>
                   <a:srgbClr val="0F172A"/>
                 </a:solidFill>
@@ -12958,7 +12958,7 @@
               </a:defRPr>
             </a:pPr>
             <a:r>
-              <a:t>• PVT-02: 流水重叠率达到 ≥ 60% [设计目标]</a:t>
+              <a:t>• [目标] 流水重叠率达 ≥ 60% (PVT-02)</a:t>
             </a:r>
           </a:p>
           <a:p>
@@ -12969,7 +12969,7 @@
               <a:spcAft>
                 <a:spcPts val="400"/>
               </a:spcAft>
-              <a:defRPr sz="1080">
+              <a:defRPr sz="960">
                 <a:solidFill>
                   <a:srgbClr val="0F172A"/>
                 </a:solidFill>
@@ -12977,7 +12977,7 @@
               </a:defRPr>
             </a:pPr>
             <a:r>
-              <a:t>• PVT-06: 6维语义核验与多卡同步 [功能目标]</a:t>
+              <a:t>• [核验] 6维语义与多卡同步 (PVT-06)</a:t>
             </a:r>
           </a:p>
           <a:p>
@@ -12988,7 +12988,7 @@
               <a:spcAft>
                 <a:spcPts val="400"/>
               </a:spcAft>
-              <a:defRPr sz="1080">
+              <a:defRPr sz="960">
                 <a:solidFill>
                   <a:srgbClr val="0F172A"/>
                 </a:solidFill>
@@ -12996,7 +12996,7 @@
               </a:defRPr>
             </a:pPr>
             <a:r>
-              <a:t>• 催熟 KPCL: F1控制与F2/F3直达 [协同目标]</a:t>
+              <a:t>• [催熟] KPCL F1 控制与 F2/F3 直达</a:t>
             </a:r>
           </a:p>
         </p:txBody>
@@ -13010,7 +13010,7 @@
         <p:spPr>
           <a:xfrm>
             <a:off x="6181344" y="1115568"/>
-            <a:ext cx="2651760" cy="3566160"/>
+            <a:ext cx="2670048" cy="3566160"/>
           </a:xfrm>
           <a:prstGeom prst="roundRect">
             <a:avLst>
@@ -13056,8 +13056,8 @@
         </p:nvSpPr>
         <p:spPr>
           <a:xfrm>
-            <a:off x="6254496" y="1207008"/>
-            <a:ext cx="2505456" cy="3383280"/>
+            <a:off x="6236208" y="1207008"/>
+            <a:ext cx="2560320" cy="3383280"/>
           </a:xfrm>
           <a:prstGeom prst="rect">
             <a:avLst/>
@@ -13090,7 +13090,7 @@
               <a:spcAft>
                 <a:spcPts val="800"/>
               </a:spcAft>
-              <a:defRPr sz="1120" b="1">
+              <a:defRPr sz="1100" b="1">
                 <a:solidFill>
                   <a:srgbClr val="0F172A"/>
                 </a:solidFill>
@@ -13098,7 +13098,7 @@
               </a:defRPr>
             </a:pPr>
             <a:r>
-              <a:t>PVT-03, 04, 05 [算法决策目标]</a:t>
+              <a:t>PVT-03, 04, 05 [算法决策]</a:t>
             </a:r>
           </a:p>
           <a:p>
@@ -13109,7 +13109,7 @@
               <a:spcAft>
                 <a:spcPts val="400"/>
               </a:spcAft>
-              <a:defRPr sz="1080">
+              <a:defRPr sz="960">
                 <a:solidFill>
                   <a:srgbClr val="0F172A"/>
                 </a:solidFill>
@@ -13117,7 +13117,7 @@
               </a:defRPr>
             </a:pPr>
             <a:r>
-              <a:t>• PVT-03: 测定远端直读适用边界 [实测目标]</a:t>
+              <a:t>• [实测] 测定远端直读适用边界 (PVT-03)</a:t>
             </a:r>
           </a:p>
           <a:p>
@@ -13128,7 +13128,7 @@
               <a:spcAft>
                 <a:spcPts val="400"/>
               </a:spcAft>
-              <a:defRPr sz="1080">
+              <a:defRPr sz="960">
                 <a:solidFill>
                   <a:srgbClr val="0F172A"/>
                 </a:solidFill>
@@ -13136,7 +13136,7 @@
               </a:defRPr>
             </a:pPr>
             <a:r>
-              <a:t>• PVT-04: 选路准确率&gt;90%与回退 [算法目标]</a:t>
+              <a:t>• [目标] 选路准确率 &gt;90% 回退 (PVT-04)</a:t>
             </a:r>
           </a:p>
           <a:p>
@@ -13147,7 +13147,7 @@
               <a:spcAft>
                 <a:spcPts val="400"/>
               </a:spcAft>
-              <a:defRPr sz="1080">
+              <a:defRPr sz="960">
                 <a:solidFill>
                   <a:srgbClr val="0F172A"/>
                 </a:solidFill>
@@ -13155,7 +13155,7 @@
               </a:defRPr>
             </a:pPr>
             <a:r>
-              <a:t>• PVT-05: 显存-SSD 裸盘直达扩容 [实测目标]</a:t>
+              <a:t>• [实测] 显存-SSD 直达扩容 (PVT-05)</a:t>
             </a:r>
           </a:p>
           <a:p>
@@ -13166,7 +13166,7 @@
               <a:spcAft>
                 <a:spcPts val="400"/>
               </a:spcAft>
-              <a:defRPr sz="1080">
+              <a:defRPr sz="960">
                 <a:solidFill>
                   <a:srgbClr val="0F172A"/>
                 </a:solidFill>
@@ -13174,7 +13174,7 @@
               </a:defRPr>
             </a:pPr>
             <a:r>
-              <a:t>• 催熟 KPCL: F4协同与F8极速撤销 [协同目标]</a:t>
+              <a:t>• [催熟] KPCL F4 协同与 F8 极速撤销</a:t>
             </a:r>
           </a:p>
         </p:txBody>
@@ -13188,7 +13188,7 @@
         <p:spPr>
           <a:xfrm>
             <a:off x="8997696" y="1115568"/>
-            <a:ext cx="2651760" cy="3566160"/>
+            <a:ext cx="2670048" cy="3566160"/>
           </a:xfrm>
           <a:prstGeom prst="roundRect">
             <a:avLst>
@@ -13234,8 +13234,8 @@
         </p:nvSpPr>
         <p:spPr>
           <a:xfrm>
-            <a:off x="9070848" y="1207008"/>
-            <a:ext cx="2505456" cy="3383280"/>
+            <a:off x="9052560" y="1207008"/>
+            <a:ext cx="2560320" cy="3383280"/>
           </a:xfrm>
           <a:prstGeom prst="rect">
             <a:avLst/>
@@ -13268,7 +13268,7 @@
               <a:spcAft>
                 <a:spcPts val="800"/>
               </a:spcAft>
-              <a:defRPr sz="1120" b="1">
+              <a:defRPr sz="1100" b="1">
                 <a:solidFill>
                   <a:srgbClr val="0F172A"/>
                 </a:solidFill>
@@ -13276,7 +13276,7 @@
               </a:defRPr>
             </a:pPr>
             <a:r>
-              <a:t>PVT-07, 10, CVT-01 [立项核心验收目标]</a:t>
+              <a:t>PVT-07, 10, CVT [核心验收]</a:t>
             </a:r>
           </a:p>
           <a:p>
@@ -13287,7 +13287,7 @@
               <a:spcAft>
                 <a:spcPts val="400"/>
               </a:spcAft>
-              <a:defRPr sz="1080">
+              <a:defRPr sz="960">
                 <a:solidFill>
                   <a:srgbClr val="0F172A"/>
                 </a:solidFill>
@@ -13295,7 +13295,7 @@
               </a:defRPr>
             </a:pPr>
             <a:r>
-              <a:t>• PVT-07: 混压 TPOT 性能干扰&lt;3% [核心门禁目标]</a:t>
+              <a:t>• [门禁] 混压 TPOT 干扰 &lt; 3% (PVT-07)</a:t>
             </a:r>
           </a:p>
           <a:p>
@@ -13306,7 +13306,7 @@
               <a:spcAft>
                 <a:spcPts val="400"/>
               </a:spcAft>
-              <a:defRPr sz="1080">
+              <a:defRPr sz="960">
                 <a:solidFill>
                   <a:srgbClr val="0F172A"/>
                 </a:solidFill>
@@ -13314,7 +13314,7 @@
               </a:defRPr>
             </a:pPr>
             <a:r>
-              <a:t>• PVT-10: 偏斜消除 (Skew &lt; 1.15) [核心门禁目标]</a:t>
+              <a:t>• [门禁] 消除偏斜 Skew &lt; 1.15 (PVT-10)</a:t>
             </a:r>
           </a:p>
           <a:p>
@@ -13325,7 +13325,7 @@
               <a:spcAft>
                 <a:spcPts val="400"/>
               </a:spcAft>
-              <a:defRPr sz="1080">
+              <a:defRPr sz="960">
                 <a:solidFill>
                   <a:srgbClr val="0F172A"/>
                 </a:solidFill>
@@ -13333,7 +13333,7 @@
               </a:defRPr>
             </a:pPr>
             <a:r>
-              <a:t>• CVT-01: 软件RCU证伪硬件重映射 [架构证伪目标]</a:t>
+              <a:t>• [证伪] 软件 RCU 证伪硬件映射 (CVT-01)</a:t>
             </a:r>
           </a:p>
           <a:p>
@@ -13344,7 +13344,7 @@
               <a:spcAft>
                 <a:spcPts val="400"/>
               </a:spcAft>
-              <a:defRPr sz="1080">
+              <a:defRPr sz="960">
                 <a:solidFill>
                   <a:srgbClr val="0F172A"/>
                 </a:solidFill>
@@ -13352,7 +13352,7 @@
               </a:defRPr>
             </a:pPr>
             <a:r>
-              <a:t>• 验收 KPCL: 成熟商用整机提速 [最终交付目标]</a:t>
+              <a:t>• [验收] KPCL 成熟商用整机提速交付</a:t>
             </a:r>
           </a:p>
         </p:txBody>
@@ -14587,10 +14587,10 @@
                 <a:tableStyleId>{5C22544A-7EE6-4342-B048-85BDC9FD1C3A}</a:tableStyleId>
               </a:tblPr>
               <a:tblGrid>
-                <a:gridCol w="3017520"/>
-                <a:gridCol w="2651760"/>
-                <a:gridCol w="3108960"/>
-                <a:gridCol w="2316175"/>
+                <a:gridCol w="2743200"/>
+                <a:gridCol w="2560320"/>
+                <a:gridCol w="2926080"/>
+                <a:gridCol w="2864815"/>
               </a:tblGrid>
               <a:tr h="514350">
                 <a:tc>
@@ -14697,7 +14697,7 @@
                     <a:lstStyle/>
                     <a:p>
                       <a:pPr algn="ctr">
-                        <a:defRPr sz="1050" b="1">
+                        <a:defRPr sz="980" b="1">
                           <a:solidFill>
                             <a:srgbClr val="0F172A"/>
                           </a:solidFill>
@@ -14721,7 +14721,7 @@
                     <a:lstStyle/>
                     <a:p>
                       <a:pPr algn="l">
-                        <a:defRPr sz="1050">
+                        <a:defRPr sz="980">
                           <a:solidFill>
                             <a:srgbClr val="0F172A"/>
                           </a:solidFill>
@@ -14745,7 +14745,7 @@
                     <a:lstStyle/>
                     <a:p>
                       <a:pPr algn="l">
-                        <a:defRPr sz="1050">
+                        <a:defRPr sz="980">
                           <a:solidFill>
                             <a:srgbClr val="0F172A"/>
                           </a:solidFill>
@@ -14769,7 +14769,7 @@
                     <a:lstStyle/>
                     <a:p>
                       <a:pPr algn="l">
-                        <a:defRPr sz="1050">
+                        <a:defRPr sz="980">
                           <a:solidFill>
                             <a:srgbClr val="0F172A"/>
                           </a:solidFill>
@@ -14795,7 +14795,7 @@
                     <a:lstStyle/>
                     <a:p>
                       <a:pPr algn="ctr">
-                        <a:defRPr sz="1050" b="1">
+                        <a:defRPr sz="980" b="1">
                           <a:solidFill>
                             <a:srgbClr val="0F172A"/>
                           </a:solidFill>
@@ -14803,7 +14803,7 @@
                         </a:defRPr>
                       </a:pPr>
                       <a:r>
-                        <a:t>质疑二：仅有 18µs 查询数据（占比&lt;0.1%）如何证明整机大幅提速？</a:t>
+                        <a:t>质疑二：仅有 18µs 查询数据 (占比&lt;0.1%) 如何证明整机大幅提速？</a:t>
                       </a:r>
                     </a:p>
                   </a:txBody>
@@ -14819,7 +14819,7 @@
                     <a:lstStyle/>
                     <a:p>
                       <a:pPr algn="l">
-                        <a:defRPr sz="1050">
+                        <a:defRPr sz="980">
                           <a:solidFill>
                             <a:srgbClr val="0F172A"/>
                           </a:solidFill>
@@ -14827,7 +14827,7 @@
                         </a:defRPr>
                       </a:pPr>
                       <a:r>
-                        <a:t>16K 前缀查询实测 URMA 18µs [实测微基准]，占 250ms TTFT [假设值] 的 0.01%，直接改善仅 0.004% [推导值]。</a:t>
+                        <a:t>16K 前缀查询实测 URMA 18µs [实测]，占 250ms TTFT [假设] 仅 0.01%，直接提速仅 0.004% [推导值]。</a:t>
                       </a:r>
                     </a:p>
                   </a:txBody>
@@ -14843,7 +14843,7 @@
                     <a:lstStyle/>
                     <a:p>
                       <a:pPr algn="l">
-                        <a:defRPr sz="1050">
+                        <a:defRPr sz="980">
                           <a:solidFill>
                             <a:srgbClr val="0F172A"/>
                           </a:solidFill>
@@ -14867,7 +14867,7 @@
                     <a:lstStyle/>
                     <a:p>
                       <a:pPr algn="l">
-                        <a:defRPr sz="1050">
+                        <a:defRPr sz="980">
                           <a:solidFill>
                             <a:srgbClr val="0F172A"/>
                           </a:solidFill>
@@ -14893,7 +14893,7 @@
                     <a:lstStyle/>
                     <a:p>
                       <a:pPr algn="ctr">
-                        <a:defRPr sz="1050" b="1">
+                        <a:defRPr sz="980" b="1">
                           <a:solidFill>
                             <a:srgbClr val="0F172A"/>
                           </a:solidFill>
@@ -14917,7 +14917,7 @@
                     <a:lstStyle/>
                     <a:p>
                       <a:pPr algn="l">
-                        <a:defRPr sz="1050">
+                        <a:defRPr sz="980">
                           <a:solidFill>
                             <a:srgbClr val="0F172A"/>
                           </a:solidFill>
@@ -14941,7 +14941,7 @@
                     <a:lstStyle/>
                     <a:p>
                       <a:pPr algn="l">
-                        <a:defRPr sz="1050">
+                        <a:defRPr sz="980">
                           <a:solidFill>
                             <a:srgbClr val="0F172A"/>
                           </a:solidFill>
@@ -14965,7 +14965,7 @@
                     <a:lstStyle/>
                     <a:p>
                       <a:pPr algn="l">
-                        <a:defRPr sz="1050">
+                        <a:defRPr sz="980">
                           <a:solidFill>
                             <a:srgbClr val="0F172A"/>
                           </a:solidFill>
@@ -14973,7 +14973,7 @@
                         </a:defRPr>
                       </a:pPr>
                       <a:r>
-                        <a:t>以真实大模型极端混压场景为通信库提供实战靶场，设立 3 条 No-Go 止损线。</a:t>
+                        <a:t>以极端在线推理混压为底座提供实战靶场，设立 3 条硬核 No-Go 止损线。</a:t>
                       </a:r>
                     </a:p>
                   </a:txBody>
@@ -14996,8 +14996,8 @@
         </p:nvSpPr>
         <p:spPr>
           <a:xfrm>
-            <a:off x="548640" y="3246120"/>
-            <a:ext cx="3547872" cy="2560320"/>
+            <a:off x="548640" y="3520440"/>
+            <a:ext cx="3504895" cy="2286000"/>
           </a:xfrm>
           <a:prstGeom prst="roundRect">
             <a:avLst>
@@ -15043,8 +15043,8 @@
         </p:nvSpPr>
         <p:spPr>
           <a:xfrm>
-            <a:off x="713232" y="3337560"/>
-            <a:ext cx="3218688" cy="2377440"/>
+            <a:off x="685800" y="3611880"/>
+            <a:ext cx="3230575" cy="2103120"/>
           </a:xfrm>
           <a:prstGeom prst="rect">
             <a:avLst/>
@@ -15059,9 +15059,9 @@
           <a:p>
             <a:pPr>
               <a:spcAft>
-                <a:spcPts val="800"/>
-              </a:spcAft>
-              <a:defRPr sz="1550" b="1">
+                <a:spcPts val="500"/>
+              </a:spcAft>
+              <a:defRPr sz="1500" b="1">
                 <a:solidFill>
                   <a:srgbClr val="1D4ED8"/>
                 </a:solidFill>
@@ -15075,12 +15075,12 @@
           <a:p>
             <a:pPr>
               <a:lnSpc>
-                <a:spcPct val="125000"/>
+                <a:spcPct val="118000"/>
               </a:lnSpc>
               <a:spcAft>
-                <a:spcPts val="500"/>
-              </a:spcAft>
-              <a:defRPr sz="1160">
+                <a:spcPts val="250"/>
+              </a:spcAft>
+              <a:defRPr sz="1060">
                 <a:solidFill>
                   <a:srgbClr val="0F172A"/>
                 </a:solidFill>
@@ -15094,12 +15094,12 @@
           <a:p>
             <a:pPr>
               <a:lnSpc>
-                <a:spcPct val="125000"/>
+                <a:spcPct val="118000"/>
               </a:lnSpc>
               <a:spcAft>
-                <a:spcPts val="500"/>
-              </a:spcAft>
-              <a:defRPr sz="1160">
+                <a:spcPts val="250"/>
+              </a:spcAft>
+              <a:defRPr sz="1060">
                 <a:solidFill>
                   <a:srgbClr val="0F172A"/>
                 </a:solidFill>
@@ -15113,12 +15113,12 @@
           <a:p>
             <a:pPr>
               <a:lnSpc>
-                <a:spcPct val="125000"/>
+                <a:spcPct val="118000"/>
               </a:lnSpc>
               <a:spcAft>
-                <a:spcPts val="500"/>
-              </a:spcAft>
-              <a:defRPr sz="1160">
+                <a:spcPts val="250"/>
+              </a:spcAft>
+              <a:defRPr sz="1060">
                 <a:solidFill>
                   <a:srgbClr val="0F172A"/>
                 </a:solidFill>
@@ -15139,8 +15139,8 @@
         </p:nvSpPr>
         <p:spPr>
           <a:xfrm>
-            <a:off x="4315968" y="3246120"/>
-            <a:ext cx="3547872" cy="2560320"/>
+            <a:off x="4343400" y="3520440"/>
+            <a:ext cx="3504895" cy="2286000"/>
           </a:xfrm>
           <a:prstGeom prst="roundRect">
             <a:avLst>
@@ -15186,8 +15186,8 @@
         </p:nvSpPr>
         <p:spPr>
           <a:xfrm>
-            <a:off x="4480560" y="3337560"/>
-            <a:ext cx="3218688" cy="2377440"/>
+            <a:off x="4480560" y="3611880"/>
+            <a:ext cx="3230575" cy="2103120"/>
           </a:xfrm>
           <a:prstGeom prst="rect">
             <a:avLst/>
@@ -15202,9 +15202,9 @@
           <a:p>
             <a:pPr>
               <a:spcAft>
-                <a:spcPts val="800"/>
-              </a:spcAft>
-              <a:defRPr sz="1550" b="1">
+                <a:spcPts val="500"/>
+              </a:spcAft>
+              <a:defRPr sz="1500" b="1">
                 <a:solidFill>
                   <a:srgbClr val="047857"/>
                 </a:solidFill>
@@ -15218,12 +15218,12 @@
           <a:p>
             <a:pPr>
               <a:lnSpc>
-                <a:spcPct val="125000"/>
+                <a:spcPct val="118000"/>
               </a:lnSpc>
               <a:spcAft>
-                <a:spcPts val="500"/>
-              </a:spcAft>
-              <a:defRPr sz="1160">
+                <a:spcPts val="250"/>
+              </a:spcAft>
+              <a:defRPr sz="1060">
                 <a:solidFill>
                   <a:srgbClr val="0F172A"/>
                 </a:solidFill>
@@ -15231,18 +15231,18 @@
               </a:defRPr>
             </a:pPr>
             <a:r>
-              <a:t>• TTFT 路径：逐层流水掩盖 98.7% 传输 [模型推导]，首字提速 47.4% [模型推导]；</a:t>
+              <a:t>• TTFT 路径：逐层流水掩盖 98.7% 传输，首字提速 47.4% [模型推导]；</a:t>
             </a:r>
           </a:p>
           <a:p>
             <a:pPr>
               <a:lnSpc>
-                <a:spcPct val="125000"/>
+                <a:spcPct val="118000"/>
               </a:lnSpc>
               <a:spcAft>
-                <a:spcPts val="500"/>
-              </a:spcAft>
-              <a:defRPr sz="1160">
+                <a:spcPts val="250"/>
+              </a:spcAft>
+              <a:defRPr sz="1060">
                 <a:solidFill>
                   <a:srgbClr val="0F172A"/>
                 </a:solidFill>
@@ -15256,12 +15256,12 @@
           <a:p>
             <a:pPr>
               <a:lnSpc>
-                <a:spcPct val="125000"/>
+                <a:spcPct val="118000"/>
               </a:lnSpc>
               <a:spcAft>
-                <a:spcPts val="500"/>
-              </a:spcAft>
-              <a:defRPr sz="1160">
+                <a:spcPts val="250"/>
+              </a:spcAft>
+              <a:defRPr sz="1060">
                 <a:solidFill>
                   <a:srgbClr val="0F172A"/>
                 </a:solidFill>
@@ -15282,8 +15282,8 @@
         </p:nvSpPr>
         <p:spPr>
           <a:xfrm>
-            <a:off x="8083296" y="3246120"/>
-            <a:ext cx="3547872" cy="2560320"/>
+            <a:off x="8138160" y="3520440"/>
+            <a:ext cx="3504895" cy="2286000"/>
           </a:xfrm>
           <a:prstGeom prst="roundRect">
             <a:avLst>
@@ -15329,8 +15329,8 @@
         </p:nvSpPr>
         <p:spPr>
           <a:xfrm>
-            <a:off x="8247888" y="3337560"/>
-            <a:ext cx="3218688" cy="2377440"/>
+            <a:off x="8275320" y="3611880"/>
+            <a:ext cx="3230575" cy="2103120"/>
           </a:xfrm>
           <a:prstGeom prst="rect">
             <a:avLst/>
@@ -15345,9 +15345,9 @@
           <a:p>
             <a:pPr>
               <a:spcAft>
-                <a:spcPts val="800"/>
-              </a:spcAft>
-              <a:defRPr sz="1550" b="1">
+                <a:spcPts val="500"/>
+              </a:spcAft>
+              <a:defRPr sz="1500" b="1">
                 <a:solidFill>
                   <a:srgbClr val="B45309"/>
                 </a:solidFill>
@@ -15361,12 +15361,12 @@
           <a:p>
             <a:pPr>
               <a:lnSpc>
-                <a:spcPct val="125000"/>
+                <a:spcPct val="118000"/>
               </a:lnSpc>
               <a:spcAft>
-                <a:spcPts val="500"/>
-              </a:spcAft>
-              <a:defRPr sz="1160">
+                <a:spcPts val="250"/>
+              </a:spcAft>
+              <a:defRPr sz="1060">
                 <a:solidFill>
                   <a:srgbClr val="0F172A"/>
                 </a:solidFill>
@@ -15380,12 +15380,12 @@
           <a:p>
             <a:pPr>
               <a:lnSpc>
-                <a:spcPct val="125000"/>
+                <a:spcPct val="118000"/>
               </a:lnSpc>
               <a:spcAft>
-                <a:spcPts val="500"/>
-              </a:spcAft>
-              <a:defRPr sz="1160">
+                <a:spcPts val="250"/>
+              </a:spcAft>
+              <a:defRPr sz="1060">
                 <a:solidFill>
                   <a:srgbClr val="0F172A"/>
                 </a:solidFill>
@@ -15399,12 +15399,12 @@
           <a:p>
             <a:pPr>
               <a:lnSpc>
-                <a:spcPct val="125000"/>
+                <a:spcPct val="118000"/>
               </a:lnSpc>
               <a:spcAft>
-                <a:spcPts val="500"/>
-              </a:spcAft>
-              <a:defRPr sz="1160">
+                <a:spcPts val="250"/>
+              </a:spcAft>
+              <a:defRPr sz="1060">
                 <a:solidFill>
                   <a:srgbClr val="0F172A"/>
                 </a:solidFill>
@@ -15749,7 +15749,7 @@
         <p:spPr>
           <a:xfrm>
             <a:off x="548640" y="1115568"/>
-            <a:ext cx="3547872" cy="4114800"/>
+            <a:ext cx="3504895" cy="4114800"/>
           </a:xfrm>
           <a:prstGeom prst="roundRect">
             <a:avLst>
@@ -15796,7 +15796,7 @@
         <p:spPr>
           <a:xfrm>
             <a:off x="713232" y="1243584"/>
-            <a:ext cx="3218688" cy="3886200"/>
+            <a:ext cx="3175711" cy="3840480"/>
           </a:xfrm>
           <a:prstGeom prst="rect">
             <a:avLst/>
@@ -15827,12 +15827,12 @@
           <a:p>
             <a:pPr>
               <a:lnSpc>
-                <a:spcPct val="126000"/>
+                <a:spcPct val="125000"/>
               </a:lnSpc>
               <a:spcAft>
-                <a:spcPts val="700"/>
-              </a:spcAft>
-              <a:defRPr sz="1180">
+                <a:spcPts val="800"/>
+              </a:spcAft>
+              <a:defRPr sz="1160">
                 <a:solidFill>
                   <a:srgbClr val="0F172A"/>
                 </a:solidFill>
@@ -15846,12 +15846,12 @@
           <a:p>
             <a:pPr>
               <a:lnSpc>
-                <a:spcPct val="126000"/>
+                <a:spcPct val="125000"/>
               </a:lnSpc>
               <a:spcAft>
-                <a:spcPts val="700"/>
-              </a:spcAft>
-              <a:defRPr sz="1180">
+                <a:spcPts val="800"/>
+              </a:spcAft>
+              <a:defRPr sz="1160">
                 <a:solidFill>
                   <a:srgbClr val="0F172A"/>
                 </a:solidFill>
@@ -15865,12 +15865,12 @@
           <a:p>
             <a:pPr>
               <a:lnSpc>
-                <a:spcPct val="126000"/>
+                <a:spcPct val="125000"/>
               </a:lnSpc>
               <a:spcAft>
-                <a:spcPts val="700"/>
-              </a:spcAft>
-              <a:defRPr sz="1180">
+                <a:spcPts val="800"/>
+              </a:spcAft>
+              <a:defRPr sz="1160">
                 <a:solidFill>
                   <a:srgbClr val="0F172A"/>
                 </a:solidFill>
@@ -15884,12 +15884,12 @@
           <a:p>
             <a:pPr>
               <a:lnSpc>
-                <a:spcPct val="126000"/>
+                <a:spcPct val="125000"/>
               </a:lnSpc>
               <a:spcAft>
-                <a:spcPts val="700"/>
-              </a:spcAft>
-              <a:defRPr sz="1180">
+                <a:spcPts val="800"/>
+              </a:spcAft>
+              <a:defRPr sz="1160">
                 <a:solidFill>
                   <a:srgbClr val="0F172A"/>
                 </a:solidFill>
@@ -15910,8 +15910,8 @@
         </p:nvSpPr>
         <p:spPr>
           <a:xfrm>
-            <a:off x="4315968" y="1115568"/>
-            <a:ext cx="3547872" cy="4114800"/>
+            <a:off x="4343400" y="1115568"/>
+            <a:ext cx="3504895" cy="4114800"/>
           </a:xfrm>
           <a:prstGeom prst="roundRect">
             <a:avLst>
@@ -15957,8 +15957,8 @@
         </p:nvSpPr>
         <p:spPr>
           <a:xfrm>
-            <a:off x="4480560" y="1243584"/>
-            <a:ext cx="3218688" cy="3886200"/>
+            <a:off x="4507992" y="1243584"/>
+            <a:ext cx="3175711" cy="3840480"/>
           </a:xfrm>
           <a:prstGeom prst="rect">
             <a:avLst/>
@@ -15989,12 +15989,12 @@
           <a:p>
             <a:pPr>
               <a:lnSpc>
-                <a:spcPct val="126000"/>
+                <a:spcPct val="125000"/>
               </a:lnSpc>
               <a:spcAft>
-                <a:spcPts val="700"/>
-              </a:spcAft>
-              <a:defRPr sz="1180">
+                <a:spcPts val="800"/>
+              </a:spcAft>
+              <a:defRPr sz="1160">
                 <a:solidFill>
                   <a:srgbClr val="0F172A"/>
                 </a:solidFill>
@@ -16008,12 +16008,12 @@
           <a:p>
             <a:pPr>
               <a:lnSpc>
-                <a:spcPct val="126000"/>
+                <a:spcPct val="125000"/>
               </a:lnSpc>
               <a:spcAft>
-                <a:spcPts val="700"/>
-              </a:spcAft>
-              <a:defRPr sz="1180">
+                <a:spcPts val="800"/>
+              </a:spcAft>
+              <a:defRPr sz="1160">
                 <a:solidFill>
                   <a:srgbClr val="0F172A"/>
                 </a:solidFill>
@@ -16027,12 +16027,12 @@
           <a:p>
             <a:pPr>
               <a:lnSpc>
-                <a:spcPct val="126000"/>
+                <a:spcPct val="125000"/>
               </a:lnSpc>
               <a:spcAft>
-                <a:spcPts val="700"/>
-              </a:spcAft>
-              <a:defRPr sz="1180">
+                <a:spcPts val="800"/>
+              </a:spcAft>
+              <a:defRPr sz="1160">
                 <a:solidFill>
                   <a:srgbClr val="0F172A"/>
                 </a:solidFill>
@@ -16046,12 +16046,12 @@
           <a:p>
             <a:pPr>
               <a:lnSpc>
-                <a:spcPct val="126000"/>
+                <a:spcPct val="125000"/>
               </a:lnSpc>
               <a:spcAft>
-                <a:spcPts val="700"/>
-              </a:spcAft>
-              <a:defRPr sz="1180">
+                <a:spcPts val="800"/>
+              </a:spcAft>
+              <a:defRPr sz="1160">
                 <a:solidFill>
                   <a:srgbClr val="0F172A"/>
                 </a:solidFill>
@@ -16072,8 +16072,8 @@
         </p:nvSpPr>
         <p:spPr>
           <a:xfrm>
-            <a:off x="8083296" y="1115568"/>
-            <a:ext cx="3547872" cy="4114800"/>
+            <a:off x="8138160" y="1115568"/>
+            <a:ext cx="3504895" cy="4114800"/>
           </a:xfrm>
           <a:prstGeom prst="roundRect">
             <a:avLst>
@@ -16119,8 +16119,8 @@
         </p:nvSpPr>
         <p:spPr>
           <a:xfrm>
-            <a:off x="8247888" y="1243584"/>
-            <a:ext cx="3218688" cy="3886200"/>
+            <a:off x="8302752" y="1243584"/>
+            <a:ext cx="3175711" cy="3840480"/>
           </a:xfrm>
           <a:prstGeom prst="rect">
             <a:avLst/>
@@ -16151,12 +16151,12 @@
           <a:p>
             <a:pPr>
               <a:lnSpc>
-                <a:spcPct val="126000"/>
+                <a:spcPct val="125000"/>
               </a:lnSpc>
               <a:spcAft>
-                <a:spcPts val="700"/>
-              </a:spcAft>
-              <a:defRPr sz="1180">
+                <a:spcPts val="800"/>
+              </a:spcAft>
+              <a:defRPr sz="1160">
                 <a:solidFill>
                   <a:srgbClr val="0F172A"/>
                 </a:solidFill>
@@ -16170,12 +16170,12 @@
           <a:p>
             <a:pPr>
               <a:lnSpc>
-                <a:spcPct val="126000"/>
+                <a:spcPct val="125000"/>
               </a:lnSpc>
               <a:spcAft>
-                <a:spcPts val="700"/>
-              </a:spcAft>
-              <a:defRPr sz="1180">
+                <a:spcPts val="800"/>
+              </a:spcAft>
+              <a:defRPr sz="1160">
                 <a:solidFill>
                   <a:srgbClr val="0F172A"/>
                 </a:solidFill>
@@ -16189,12 +16189,12 @@
           <a:p>
             <a:pPr>
               <a:lnSpc>
-                <a:spcPct val="126000"/>
+                <a:spcPct val="125000"/>
               </a:lnSpc>
               <a:spcAft>
-                <a:spcPts val="700"/>
-              </a:spcAft>
-              <a:defRPr sz="1180">
+                <a:spcPts val="800"/>
+              </a:spcAft>
+              <a:defRPr sz="1160">
                 <a:solidFill>
                   <a:srgbClr val="0F172A"/>
                 </a:solidFill>
@@ -16208,12 +16208,12 @@
           <a:p>
             <a:pPr>
               <a:lnSpc>
-                <a:spcPct val="126000"/>
+                <a:spcPct val="125000"/>
               </a:lnSpc>
               <a:spcAft>
-                <a:spcPts val="700"/>
-              </a:spcAft>
-              <a:defRPr sz="1180">
+                <a:spcPts val="800"/>
+              </a:spcAft>
+              <a:defRPr sz="1160">
                 <a:solidFill>
                   <a:srgbClr val="0F172A"/>
                 </a:solidFill>
@@ -16659,7 +16659,7 @@
         <p:spPr>
           <a:xfrm>
             <a:off x="548640" y="1115568"/>
-            <a:ext cx="5577840" cy="4114800"/>
+            <a:ext cx="5486400" cy="4114800"/>
           </a:xfrm>
           <a:prstGeom prst="roundRect">
             <a:avLst>
@@ -16705,8 +16705,8 @@
         </p:nvSpPr>
         <p:spPr>
           <a:xfrm>
-            <a:off x="731520" y="1188720"/>
-            <a:ext cx="5212080" cy="320040"/>
+            <a:off x="731520" y="1207008"/>
+            <a:ext cx="5120640" cy="365760"/>
           </a:xfrm>
           <a:prstGeom prst="rect">
             <a:avLst/>
@@ -17656,7 +17656,7 @@
           <a:p>
             <a:pPr>
               <a:spcAft>
-                <a:spcPts val="800"/>
+                <a:spcPts val="600"/>
               </a:spcAft>
               <a:defRPr sz="1550" b="1">
                 <a:solidFill>
@@ -17672,12 +17672,12 @@
           <a:p>
             <a:pPr>
               <a:lnSpc>
-                <a:spcPct val="125000"/>
+                <a:spcPct val="120000"/>
               </a:lnSpc>
               <a:spcAft>
-                <a:spcPts val="500"/>
-              </a:spcAft>
-              <a:defRPr sz="1180">
+                <a:spcPts val="300"/>
+              </a:spcAft>
+              <a:defRPr sz="1080">
                 <a:solidFill>
                   <a:srgbClr val="0F172A"/>
                 </a:solidFill>
@@ -17685,18 +17685,18 @@
               </a:defRPr>
             </a:pPr>
             <a:r>
-              <a:t>• 结构参数常数 [物理常数]：Llama-3-70B，80 层，GQA 机制，TP=8 单卡 40 KB/Token；</a:t>
+              <a:t>• 结构参数常数 [物理常数]：70B 共 80 层，GQA，TP=8 单卡 40 KB/Token；</a:t>
             </a:r>
           </a:p>
           <a:p>
             <a:pPr>
               <a:lnSpc>
-                <a:spcPct val="125000"/>
+                <a:spcPct val="120000"/>
               </a:lnSpc>
               <a:spcAft>
-                <a:spcPts val="500"/>
-              </a:spcAft>
-              <a:defRPr sz="1180">
+                <a:spcPts val="300"/>
+              </a:spcAft>
+              <a:defRPr sz="1080">
                 <a:solidFill>
                   <a:srgbClr val="0F172A"/>
                 </a:solidFill>
@@ -17704,18 +17704,18 @@
               </a:defRPr>
             </a:pPr>
             <a:r>
-              <a:t>• 典型业务输入 [假设场景]：16K Prompt (命中 8K 前缀)，生成 128 Tokens；</a:t>
+              <a:t>• 典型业务输入 [假设场景]：16K 请求命中 8K 前缀，生成 128 Tokens；</a:t>
             </a:r>
           </a:p>
           <a:p>
             <a:pPr>
               <a:lnSpc>
-                <a:spcPct val="125000"/>
+                <a:spcPct val="120000"/>
               </a:lnSpc>
               <a:spcAft>
-                <a:spcPts val="500"/>
-              </a:spcAft>
-              <a:defRPr sz="1180">
+                <a:spcPts val="300"/>
+              </a:spcAft>
+              <a:defRPr sz="1080">
                 <a:solidFill>
                   <a:srgbClr val="0F172A"/>
                 </a:solidFill>
@@ -17723,18 +17723,18 @@
               </a:defRPr>
             </a:pPr>
             <a:r>
-              <a:t>• 单卡复用数据量 [推导计算]：V = 8192 Tokens × 40 KB = 320 MB (整机 2.56 GB)；</a:t>
+              <a:t>• 单卡复用数据量 [推导计算]：V = 8192 × 40KB = 320 MB (整机 2.56GB)；</a:t>
             </a:r>
           </a:p>
           <a:p>
             <a:pPr>
               <a:lnSpc>
-                <a:spcPct val="125000"/>
+                <a:spcPct val="120000"/>
               </a:lnSpc>
               <a:spcAft>
-                <a:spcPts val="500"/>
-              </a:spcAft>
-              <a:defRPr sz="1180">
+                <a:spcPts val="300"/>
+              </a:spcAft>
+              <a:defRPr sz="1080">
                 <a:solidFill>
                   <a:srgbClr val="0F172A"/>
                 </a:solidFill>
@@ -17742,18 +17742,18 @@
               </a:defRPr>
             </a:pPr>
             <a:r>
-              <a:t>• 硬件链路能力 [标称假设]：单卡有效 URMA 带宽 20 GB/s，HBM 物理带宽 1.2 TB/s；</a:t>
+              <a:t>• 硬件链路能力 [标称假设]：单卡有效带宽 20GB/s，HBM 物理带宽 1.2TB/s；</a:t>
             </a:r>
           </a:p>
           <a:p>
             <a:pPr>
               <a:lnSpc>
-                <a:spcPct val="125000"/>
+                <a:spcPct val="120000"/>
               </a:lnSpc>
               <a:spcAft>
-                <a:spcPts val="500"/>
-              </a:spcAft>
-              <a:defRPr sz="1180">
+                <a:spcPts val="300"/>
+              </a:spcAft>
+              <a:defRPr sz="1080">
                 <a:solidFill>
                   <a:srgbClr val="0F172A"/>
                 </a:solidFill>
@@ -17761,18 +17761,18 @@
               </a:defRPr>
             </a:pPr>
             <a:r>
-              <a:t>• 算力基准常数 [基准假设]：16K 重算 420.0ms；8K 后缀因果计算 220.0ms；</a:t>
+              <a:t>• 算力基准常数 [基准假设]：16K 重算 420ms，8K 后缀因果计算 220ms；</a:t>
             </a:r>
           </a:p>
           <a:p>
             <a:pPr>
               <a:lnSpc>
-                <a:spcPct val="125000"/>
+                <a:spcPct val="120000"/>
               </a:lnSpc>
               <a:spcAft>
-                <a:spcPts val="500"/>
-              </a:spcAft>
-              <a:defRPr sz="1180">
+                <a:spcPts val="300"/>
+              </a:spcAft>
+              <a:defRPr sz="1080">
                 <a:solidFill>
                   <a:srgbClr val="0F172A"/>
                 </a:solidFill>
@@ -17780,18 +17780,18 @@
               </a:defRPr>
             </a:pPr>
             <a:r>
-              <a:t>• 纯算力节省空间 [推导值]：ΔT_comp = 420.0 ms − 220.0 ms = 200.0 ms；</a:t>
+              <a:t>• 纯算力节省空间 [推导值]：ΔT_comp = 420ms − 220ms = 200ms；</a:t>
             </a:r>
           </a:p>
           <a:p>
             <a:pPr>
               <a:lnSpc>
-                <a:spcPct val="125000"/>
+                <a:spcPct val="120000"/>
               </a:lnSpc>
               <a:spcAft>
-                <a:spcPts val="500"/>
-              </a:spcAft>
-              <a:defRPr sz="1180">
+                <a:spcPts val="300"/>
+              </a:spcAft>
+              <a:defRPr sz="1080">
                 <a:solidFill>
                   <a:srgbClr val="0F172A"/>
                 </a:solidFill>
@@ -17799,7 +17799,7 @@
               </a:defRPr>
             </a:pPr>
             <a:r>
-              <a:t>• 物理瓶颈 [推导值]：串行拉取 320MB 耗时 16~24ms，未掩盖将吞噬收益；</a:t>
+              <a:t>• 物理搬运瓶颈 [推导值]：串行拉取 320MB 耗时 24ms (吞噬净收益)。</a:t>
             </a:r>
           </a:p>
         </p:txBody>
@@ -17874,7 +17874,7 @@
           <a:lstStyle/>
           <a:p>
             <a:pPr>
-              <a:defRPr sz="1180" b="1">
+              <a:defRPr sz="1120" b="1">
                 <a:solidFill>
                   <a:srgbClr val="1D4ED8"/>
                 </a:solidFill>
@@ -17882,7 +17882,7 @@
               </a:defRPr>
             </a:pPr>
             <a:r>
-              <a:t>关键路径推导：TTFT = T_control (0.50ms [目标]) + T_load (0.31ms [推导]) + T_sync (0.08ms [目标]) + T_suffix (220.0ms [假设]) = 220.89 ms [模型推导值]</a:t>
+              <a:t>关键路径推导 [模型]：TTFT = T_ctrl(0.50ms[目标]) + T_load(0.31ms[推导]) + T_sync(0.08ms[目标]) + T_suffix(220ms[假设]) = 220.89ms [推导值]</a:t>
             </a:r>
           </a:p>
         </p:txBody>
@@ -18518,9 +18518,6 @@
               <a:lnSpc>
                 <a:spcPct val="122000"/>
               </a:lnSpc>
-              <a:spcAft>
-                <a:spcPts val="400"/>
-              </a:spcAft>
               <a:defRPr sz="1160" b="0">
                 <a:solidFill>
                   <a:srgbClr val="0F172A"/>
@@ -18537,9 +18534,6 @@
               <a:lnSpc>
                 <a:spcPct val="122000"/>
               </a:lnSpc>
-              <a:spcAft>
-                <a:spcPts val="400"/>
-              </a:spcAft>
               <a:defRPr sz="1160" b="1">
                 <a:solidFill>
                   <a:srgbClr val="0F172A"/>
@@ -18556,9 +18550,6 @@
               <a:lnSpc>
                 <a:spcPct val="122000"/>
               </a:lnSpc>
-              <a:spcAft>
-                <a:spcPts val="400"/>
-              </a:spcAft>
               <a:defRPr sz="1160" b="0">
                 <a:solidFill>
                   <a:srgbClr val="0F172A"/>
@@ -18575,9 +18566,6 @@
               <a:lnSpc>
                 <a:spcPct val="122000"/>
               </a:lnSpc>
-              <a:spcAft>
-                <a:spcPts val="400"/>
-              </a:spcAft>
               <a:defRPr sz="1160" b="0">
                 <a:solidFill>
                   <a:srgbClr val="0F172A"/>
@@ -18586,7 +18574,7 @@
               </a:defRPr>
             </a:pPr>
             <a:r>
-              <a:t>  • 盈亏门槛 [推导值]：命中前缀必须超过 850 Tokens，才能弥补控制开销；</a:t>
+              <a:t>  • 盈亏门槛 [推导值]：命中前缀须超 850 Tokens 才能弥补开销；</a:t>
             </a:r>
           </a:p>
           <a:p>
@@ -18594,9 +18582,6 @@
               <a:lnSpc>
                 <a:spcPct val="122000"/>
               </a:lnSpc>
-              <a:spcAft>
-                <a:spcPts val="400"/>
-              </a:spcAft>
               <a:defRPr sz="1160" b="0">
                 <a:solidFill>
                   <a:srgbClr val="0F172A"/>
@@ -18613,9 +18598,6 @@
               <a:lnSpc>
                 <a:spcPct val="122000"/>
               </a:lnSpc>
-              <a:spcAft>
-                <a:spcPts val="400"/>
-              </a:spcAft>
               <a:defRPr sz="1160" b="1">
                 <a:solidFill>
                   <a:srgbClr val="0F172A"/>
@@ -18632,9 +18614,6 @@
               <a:lnSpc>
                 <a:spcPct val="122000"/>
               </a:lnSpc>
-              <a:spcAft>
-                <a:spcPts val="400"/>
-              </a:spcAft>
               <a:defRPr sz="1160" b="0">
                 <a:solidFill>
                   <a:srgbClr val="0F172A"/>
@@ -18651,9 +18630,6 @@
               <a:lnSpc>
                 <a:spcPct val="122000"/>
               </a:lnSpc>
-              <a:spcAft>
-                <a:spcPts val="400"/>
-              </a:spcAft>
               <a:defRPr sz="1160" b="0">
                 <a:solidFill>
                   <a:srgbClr val="1E3A8A"/>
@@ -18670,9 +18646,6 @@
               <a:lnSpc>
                 <a:spcPct val="122000"/>
               </a:lnSpc>
-              <a:spcAft>
-                <a:spcPts val="400"/>
-              </a:spcAft>
               <a:defRPr sz="1160" b="1">
                 <a:solidFill>
                   <a:srgbClr val="1E3A8A"/>
@@ -19179,12 +19152,12 @@
           <a:p>
             <a:pPr>
               <a:lnSpc>
-                <a:spcPct val="124000"/>
+                <a:spcPct val="118000"/>
               </a:lnSpc>
               <a:spcAft>
-                <a:spcPts val="400"/>
-              </a:spcAft>
-              <a:defRPr sz="1180" b="0">
+                <a:spcPts val="200"/>
+              </a:spcAft>
+              <a:defRPr sz="1060" b="0">
                 <a:solidFill>
                   <a:srgbClr val="0F172A"/>
                 </a:solidFill>
@@ -19192,18 +19165,18 @@
               </a:defRPr>
             </a:pPr>
             <a:r>
-              <a:t>模型物理拆解 [物理常数]：70B 模型共 80 层，单卡 320MB 缓存对应每层 4.0MB；</a:t>
+              <a:t>模型物理拆解 [物理常数]：70B 模型共 80 层，单卡 320MB 对应每层 4MB；</a:t>
             </a:r>
           </a:p>
           <a:p>
             <a:pPr>
               <a:lnSpc>
-                <a:spcPct val="124000"/>
+                <a:spcPct val="118000"/>
               </a:lnSpc>
               <a:spcAft>
-                <a:spcPts val="400"/>
-              </a:spcAft>
-              <a:defRPr sz="1180" b="0">
+                <a:spcPts val="200"/>
+              </a:spcAft>
+              <a:defRPr sz="1060" b="0">
                 <a:solidFill>
                   <a:srgbClr val="0F172A"/>
                 </a:solidFill>
@@ -19217,12 +19190,12 @@
           <a:p>
             <a:pPr>
               <a:lnSpc>
-                <a:spcPct val="124000"/>
+                <a:spcPct val="118000"/>
               </a:lnSpc>
               <a:spcAft>
-                <a:spcPts val="400"/>
-              </a:spcAft>
-              <a:defRPr sz="1180" b="0">
+                <a:spcPts val="200"/>
+              </a:spcAft>
+              <a:defRPr sz="1060" b="0">
                 <a:solidFill>
                   <a:srgbClr val="0F172A"/>
                 </a:solidFill>
@@ -19230,18 +19203,18 @@
               </a:defRPr>
             </a:pPr>
             <a:r>
-              <a:t>  • 单层增量 Prefill 计算耗时 [基准推导]：c = 220.0 ms / 80 = 2.75 ms；</a:t>
+              <a:t>  • 单层增量计算耗时 [基准推导]：c = 220.0ms / 80 = 2.75ms；</a:t>
             </a:r>
           </a:p>
           <a:p>
             <a:pPr>
               <a:lnSpc>
-                <a:spcPct val="124000"/>
+                <a:spcPct val="118000"/>
               </a:lnSpc>
               <a:spcAft>
-                <a:spcPts val="400"/>
-              </a:spcAft>
-              <a:defRPr sz="1180" b="0">
+                <a:spcPts val="200"/>
+              </a:spcAft>
+              <a:defRPr sz="1060" b="0">
                 <a:solidFill>
                   <a:srgbClr val="0F172A"/>
                 </a:solidFill>
@@ -19249,18 +19222,18 @@
               </a:defRPr>
             </a:pPr>
             <a:r>
-              <a:t>  • 单层 4.0MB 传输耗时 [模型推导]：x = 4MB / 20GB/s = 0.20ms (调度开销下 ≤ 0.31ms)；</a:t>
+              <a:t>  • 单层 4MB 传输 [推导]：x = 4MB / 20GB/s = 0.20ms (调度 ≤ 0.31ms)；</a:t>
             </a:r>
           </a:p>
           <a:p>
             <a:pPr>
               <a:lnSpc>
-                <a:spcPct val="124000"/>
+                <a:spcPct val="118000"/>
               </a:lnSpc>
               <a:spcAft>
-                <a:spcPts val="400"/>
-              </a:spcAft>
-              <a:defRPr sz="1180" b="1">
+                <a:spcPts val="200"/>
+              </a:spcAft>
+              <a:defRPr sz="1060" b="1">
                 <a:solidFill>
                   <a:srgbClr val="0F172A"/>
                 </a:solidFill>
@@ -19268,18 +19241,18 @@
               </a:defRPr>
             </a:pPr>
             <a:r>
-              <a:t>体系结构特性 [物理分析]：单层计算耗时 (2.75ms) 是传输耗时 (0.31ms) 近 9 倍；</a:t>
+              <a:t>体系结构特性 [物理分析]：单层计算 (2.75ms) 是传输 (0.31ms) 近 9 倍；</a:t>
             </a:r>
           </a:p>
           <a:p>
             <a:pPr>
               <a:lnSpc>
-                <a:spcPct val="124000"/>
+                <a:spcPct val="118000"/>
               </a:lnSpc>
               <a:spcAft>
-                <a:spcPts val="400"/>
-              </a:spcAft>
-              <a:defRPr sz="1180" b="0">
+                <a:spcPts val="200"/>
+              </a:spcAft>
+              <a:defRPr sz="1060" b="0">
                 <a:solidFill>
                   <a:srgbClr val="0F172A"/>
                 </a:solidFill>
@@ -19293,12 +19266,12 @@
           <a:p>
             <a:pPr>
               <a:lnSpc>
-                <a:spcPct val="124000"/>
+                <a:spcPct val="118000"/>
               </a:lnSpc>
               <a:spcAft>
-                <a:spcPts val="400"/>
-              </a:spcAft>
-              <a:defRPr sz="1180" b="0">
+                <a:spcPts val="200"/>
+              </a:spcAft>
+              <a:defRPr sz="1060" b="0">
                 <a:solidFill>
                   <a:srgbClr val="0F172A"/>
                 </a:solidFill>
@@ -19306,18 +19279,18 @@
               </a:defRPr>
             </a:pPr>
             <a:r>
-              <a:t>  • 串行拉取暴露时间 [推导值]：80 × 0.31 ms = 24.80 ms；</a:t>
+              <a:t>  • 串行拉取暴露耗时 [推导值]：80 × 0.31 ms = 24.80 ms；</a:t>
             </a:r>
           </a:p>
           <a:p>
             <a:pPr>
               <a:lnSpc>
-                <a:spcPct val="124000"/>
+                <a:spcPct val="118000"/>
               </a:lnSpc>
               <a:spcAft>
-                <a:spcPts val="400"/>
-              </a:spcAft>
-              <a:defRPr sz="1180" b="0">
+                <a:spcPts val="200"/>
+              </a:spcAft>
+              <a:defRPr sz="1060" b="0">
                 <a:solidFill>
                   <a:srgbClr val="0F172A"/>
                 </a:solidFill>
@@ -19325,18 +19298,18 @@
               </a:defRPr>
             </a:pPr>
             <a:r>
-              <a:t>  • 逐层流水暴露时间 [推导值]：仅暴露 Layer 0 启动传输耗时 x_0 = 0.31 ms；</a:t>
+              <a:t>  • 逐层流水暴露耗时 [推导值]：仅暴露首层启动传输耗时 x_0 = 0.31ms；</a:t>
             </a:r>
           </a:p>
           <a:p>
             <a:pPr>
               <a:lnSpc>
-                <a:spcPct val="124000"/>
+                <a:spcPct val="118000"/>
               </a:lnSpc>
               <a:spcAft>
-                <a:spcPts val="400"/>
-              </a:spcAft>
-              <a:defRPr sz="1180" b="1">
+                <a:spcPts val="200"/>
+              </a:spcAft>
+              <a:defRPr sz="1060" b="1">
                 <a:solidFill>
                   <a:srgbClr val="1E3A8A"/>
                 </a:solidFill>
@@ -19344,7 +19317,7 @@
               </a:defRPr>
             </a:pPr>
             <a:r>
-              <a:t>物理消除幅度 [推导值]：流水线掩盖 98.7% 传输耗时，单卡净节省 24.49 ms。</a:t>
+              <a:t>物理消除幅度 [推导值]：流水线掩盖 98.7% 传输耗时，单卡净省 24.49 ms。</a:t>
             </a:r>
           </a:p>
         </p:txBody>
@@ -19945,10 +19918,10 @@
                 <a:tableStyleId>{5C22544A-7EE6-4342-B048-85BDC9FD1C3A}</a:tableStyleId>
               </a:tblPr>
               <a:tblGrid>
+                <a:gridCol w="1417320"/>
                 <a:gridCol w="1645920"/>
-                <a:gridCol w="1371600"/>
                 <a:gridCol w="2148840"/>
-                <a:gridCol w="2240280"/>
+                <a:gridCol w="2194560"/>
                 <a:gridCol w="3687775"/>
               </a:tblGrid>
               <a:tr h="377952">
@@ -19990,7 +19963,7 @@
                         </a:defRPr>
                       </a:pPr>
                       <a:r>
-                        <a:t>① 本地完全重算 [基准假设]</a:t>
+                        <a:t>① 本地重算 [基准假设]</a:t>
                       </a:r>
                     </a:p>
                   </a:txBody>
@@ -20080,7 +20053,7 @@
                     <a:lstStyle/>
                     <a:p>
                       <a:pPr algn="ctr">
-                        <a:defRPr sz="1050" b="1">
+                        <a:defRPr sz="1000" b="1">
                           <a:solidFill>
                             <a:srgbClr val="0F172A"/>
                           </a:solidFill>
@@ -20104,7 +20077,7 @@
                     <a:lstStyle/>
                     <a:p>
                       <a:pPr algn="l">
-                        <a:defRPr sz="1050">
+                        <a:defRPr sz="1000">
                           <a:solidFill>
                             <a:srgbClr val="0F172A"/>
                           </a:solidFill>
@@ -20128,7 +20101,7 @@
                     <a:lstStyle/>
                     <a:p>
                       <a:pPr algn="l">
-                        <a:defRPr sz="1050">
+                        <a:defRPr sz="1000">
                           <a:solidFill>
                             <a:srgbClr val="0F172A"/>
                           </a:solidFill>
@@ -20136,7 +20109,7 @@
                         </a:defRPr>
                       </a:pPr>
                       <a:r>
-                        <a:t>21.00 ms [估算] (TCP 12.5+CPU 8.5)</a:t>
+                        <a:t>21.00 ms [估算] (TCP 12.5+CPU 8.5ms)</a:t>
                       </a:r>
                     </a:p>
                   </a:txBody>
@@ -20152,7 +20125,7 @@
                     <a:lstStyle/>
                     <a:p>
                       <a:pPr algn="l">
-                        <a:defRPr sz="1050">
+                        <a:defRPr sz="1000">
                           <a:solidFill>
                             <a:srgbClr val="0F172A"/>
                           </a:solidFill>
@@ -20160,7 +20133,7 @@
                         </a:defRPr>
                       </a:pPr>
                       <a:r>
-                        <a:t>0.50 ms [推导] (含URMA 18µs实测)</a:t>
+                        <a:t>0.50 ms [推导] (含 18µs 实测)</a:t>
                       </a:r>
                     </a:p>
                   </a:txBody>
@@ -20176,7 +20149,7 @@
                     <a:lstStyle/>
                     <a:p>
                       <a:pPr algn="l">
-                        <a:defRPr sz="1050">
+                        <a:defRPr sz="1000">
                           <a:solidFill>
                             <a:srgbClr val="0F172A"/>
                           </a:solidFill>
@@ -20202,7 +20175,7 @@
                     <a:lstStyle/>
                     <a:p>
                       <a:pPr algn="ctr">
-                        <a:defRPr sz="1050" b="1">
+                        <a:defRPr sz="1000" b="1">
                           <a:solidFill>
                             <a:srgbClr val="0F172A"/>
                           </a:solidFill>
@@ -20226,7 +20199,7 @@
                     <a:lstStyle/>
                     <a:p>
                       <a:pPr algn="l">
-                        <a:defRPr sz="1050">
+                        <a:defRPr sz="1000">
                           <a:solidFill>
                             <a:srgbClr val="0F172A"/>
                           </a:solidFill>
@@ -20250,7 +20223,7 @@
                     <a:lstStyle/>
                     <a:p>
                       <a:pPr algn="l">
-                        <a:defRPr sz="1050">
+                        <a:defRPr sz="1000">
                           <a:solidFill>
                             <a:srgbClr val="0F172A"/>
                           </a:solidFill>
@@ -20274,7 +20247,7 @@
                     <a:lstStyle/>
                     <a:p>
                       <a:pPr algn="l">
-                        <a:defRPr sz="1050">
+                        <a:defRPr sz="1000">
                           <a:solidFill>
                             <a:srgbClr val="0F172A"/>
                           </a:solidFill>
@@ -20298,7 +20271,7 @@
                     <a:lstStyle/>
                     <a:p>
                       <a:pPr algn="l">
-                        <a:defRPr sz="1050">
+                        <a:defRPr sz="1000">
                           <a:solidFill>
                             <a:srgbClr val="0F172A"/>
                           </a:solidFill>
@@ -20324,7 +20297,7 @@
                     <a:lstStyle/>
                     <a:p>
                       <a:pPr algn="ctr">
-                        <a:defRPr sz="1050" b="1">
+                        <a:defRPr sz="1000" b="1">
                           <a:solidFill>
                             <a:srgbClr val="0F172A"/>
                           </a:solidFill>
@@ -20348,7 +20321,7 @@
                     <a:lstStyle/>
                     <a:p>
                       <a:pPr algn="l">
-                        <a:defRPr sz="1050">
+                        <a:defRPr sz="1000">
                           <a:solidFill>
                             <a:srgbClr val="0F172A"/>
                           </a:solidFill>
@@ -20372,7 +20345,7 @@
                     <a:lstStyle/>
                     <a:p>
                       <a:pPr algn="l">
-                        <a:defRPr sz="1050">
+                        <a:defRPr sz="1000">
                           <a:solidFill>
                             <a:srgbClr val="0F172A"/>
                           </a:solidFill>
@@ -20396,7 +20369,7 @@
                     <a:lstStyle/>
                     <a:p>
                       <a:pPr algn="l">
-                        <a:defRPr sz="1050">
+                        <a:defRPr sz="1000">
                           <a:solidFill>
                             <a:srgbClr val="0F172A"/>
                           </a:solidFill>
@@ -20420,7 +20393,7 @@
                     <a:lstStyle/>
                     <a:p>
                       <a:pPr algn="l">
-                        <a:defRPr sz="1050">
+                        <a:defRPr sz="1000">
                           <a:solidFill>
                             <a:srgbClr val="0F172A"/>
                           </a:solidFill>
@@ -20446,7 +20419,7 @@
                     <a:lstStyle/>
                     <a:p>
                       <a:pPr algn="ctr">
-                        <a:defRPr sz="1050" b="1">
+                        <a:defRPr sz="1000" b="1">
                           <a:solidFill>
                             <a:srgbClr val="0F172A"/>
                           </a:solidFill>
@@ -20470,7 +20443,7 @@
                     <a:lstStyle/>
                     <a:p>
                       <a:pPr algn="l">
-                        <a:defRPr sz="1050">
+                        <a:defRPr sz="1000">
                           <a:solidFill>
                             <a:srgbClr val="0F172A"/>
                           </a:solidFill>
@@ -20494,7 +20467,7 @@
                     <a:lstStyle/>
                     <a:p>
                       <a:pPr algn="l">
-                        <a:defRPr sz="1050">
+                        <a:defRPr sz="1000">
                           <a:solidFill>
                             <a:srgbClr val="0F172A"/>
                           </a:solidFill>
@@ -20518,7 +20491,7 @@
                     <a:lstStyle/>
                     <a:p>
                       <a:pPr algn="l">
-                        <a:defRPr sz="1050">
+                        <a:defRPr sz="1000">
                           <a:solidFill>
                             <a:srgbClr val="0F172A"/>
                           </a:solidFill>
@@ -20542,7 +20515,7 @@
                     <a:lstStyle/>
                     <a:p>
                       <a:pPr algn="l">
-                        <a:defRPr sz="1050">
+                        <a:defRPr sz="1000">
                           <a:solidFill>
                             <a:srgbClr val="0F172A"/>
                           </a:solidFill>
@@ -20568,7 +20541,7 @@
                     <a:lstStyle/>
                     <a:p>
                       <a:pPr algn="ctr">
-                        <a:defRPr sz="1050" b="1">
+                        <a:defRPr sz="1000" b="1">
                           <a:solidFill>
                             <a:srgbClr val="0F172A"/>
                           </a:solidFill>
@@ -20592,7 +20565,7 @@
                     <a:lstStyle/>
                     <a:p>
                       <a:pPr algn="l">
-                        <a:defRPr sz="1050">
+                        <a:defRPr sz="1000">
                           <a:solidFill>
                             <a:srgbClr val="0F172A"/>
                           </a:solidFill>
@@ -20616,7 +20589,7 @@
                     <a:lstStyle/>
                     <a:p>
                       <a:pPr algn="l">
-                        <a:defRPr sz="1050">
+                        <a:defRPr sz="1000">
                           <a:solidFill>
                             <a:srgbClr val="0F172A"/>
                           </a:solidFill>
@@ -20640,7 +20613,7 @@
                     <a:lstStyle/>
                     <a:p>
                       <a:pPr algn="l">
-                        <a:defRPr sz="1050">
+                        <a:defRPr sz="1000">
                           <a:solidFill>
                             <a:srgbClr val="0F172A"/>
                           </a:solidFill>
@@ -20664,7 +20637,7 @@
                     <a:lstStyle/>
                     <a:p>
                       <a:pPr algn="l">
-                        <a:defRPr sz="1050">
+                        <a:defRPr sz="1000">
                           <a:solidFill>
                             <a:srgbClr val="0F172A"/>
                           </a:solidFill>
@@ -20690,7 +20663,7 @@
                     <a:lstStyle/>
                     <a:p>
                       <a:pPr algn="ctr">
-                        <a:defRPr sz="1050" b="1">
+                        <a:defRPr sz="1000" b="1">
                           <a:solidFill>
                             <a:srgbClr val="0F172A"/>
                           </a:solidFill>
@@ -20714,7 +20687,7 @@
                     <a:lstStyle/>
                     <a:p>
                       <a:pPr algn="l">
-                        <a:defRPr sz="1050">
+                        <a:defRPr sz="1000">
                           <a:solidFill>
                             <a:srgbClr val="0F172A"/>
                           </a:solidFill>
@@ -20738,7 +20711,7 @@
                     <a:lstStyle/>
                     <a:p>
                       <a:pPr algn="l">
-                        <a:defRPr sz="1050">
+                        <a:defRPr sz="1000">
                           <a:solidFill>
                             <a:srgbClr val="0F172A"/>
                           </a:solidFill>
@@ -20762,7 +20735,7 @@
                     <a:lstStyle/>
                     <a:p>
                       <a:pPr algn="l">
-                        <a:defRPr sz="1050">
+                        <a:defRPr sz="1000">
                           <a:solidFill>
                             <a:srgbClr val="0F172A"/>
                           </a:solidFill>
@@ -20786,7 +20759,7 @@
                     <a:lstStyle/>
                     <a:p>
                       <a:pPr algn="l">
-                        <a:defRPr sz="1050">
+                        <a:defRPr sz="1000">
                           <a:solidFill>
                             <a:srgbClr val="0F172A"/>
                           </a:solidFill>
@@ -20812,7 +20785,7 @@
                     <a:lstStyle/>
                     <a:p>
                       <a:pPr algn="ctr">
-                        <a:defRPr sz="1050" b="1">
+                        <a:defRPr sz="1000" b="1">
                           <a:solidFill>
                             <a:srgbClr val="0F172A"/>
                           </a:solidFill>
@@ -20836,7 +20809,7 @@
                     <a:lstStyle/>
                     <a:p>
                       <a:pPr algn="l">
-                        <a:defRPr sz="1050">
+                        <a:defRPr sz="1000">
                           <a:solidFill>
                             <a:srgbClr val="0F172A"/>
                           </a:solidFill>
@@ -20860,7 +20833,7 @@
                     <a:lstStyle/>
                     <a:p>
                       <a:pPr algn="l">
-                        <a:defRPr sz="1050">
+                        <a:defRPr sz="1000">
                           <a:solidFill>
                             <a:srgbClr val="0F172A"/>
                           </a:solidFill>
@@ -20884,7 +20857,7 @@
                     <a:lstStyle/>
                     <a:p>
                       <a:pPr algn="l">
-                        <a:defRPr sz="1050">
+                        <a:defRPr sz="1000">
                           <a:solidFill>
                             <a:srgbClr val="0F172A"/>
                           </a:solidFill>
@@ -20908,7 +20881,7 @@
                     <a:lstStyle/>
                     <a:p>
                       <a:pPr algn="l">
-                        <a:defRPr sz="1050">
+                        <a:defRPr sz="1000">
                           <a:solidFill>
                             <a:srgbClr val="0F172A"/>
                           </a:solidFill>
@@ -20934,7 +20907,7 @@
                     <a:lstStyle/>
                     <a:p>
                       <a:pPr algn="ctr">
-                        <a:defRPr sz="1050" b="1">
+                        <a:defRPr sz="1000" b="1">
                           <a:solidFill>
                             <a:srgbClr val="0F172A"/>
                           </a:solidFill>
@@ -20958,7 +20931,7 @@
                     <a:lstStyle/>
                     <a:p>
                       <a:pPr algn="l">
-                        <a:defRPr sz="1050">
+                        <a:defRPr sz="1000">
                           <a:solidFill>
                             <a:srgbClr val="0F172A"/>
                           </a:solidFill>
@@ -20982,7 +20955,7 @@
                     <a:lstStyle/>
                     <a:p>
                       <a:pPr algn="l">
-                        <a:defRPr sz="1050">
+                        <a:defRPr sz="1000">
                           <a:solidFill>
                             <a:srgbClr val="0F172A"/>
                           </a:solidFill>
@@ -21006,7 +20979,7 @@
                     <a:lstStyle/>
                     <a:p>
                       <a:pPr algn="l">
-                        <a:defRPr sz="1050">
+                        <a:defRPr sz="1000">
                           <a:solidFill>
                             <a:srgbClr val="0F172A"/>
                           </a:solidFill>
@@ -21030,7 +21003,7 @@
                     <a:lstStyle/>
                     <a:p>
                       <a:pPr algn="l">
-                        <a:defRPr sz="1050">
+                        <a:defRPr sz="1000">
                           <a:solidFill>
                             <a:srgbClr val="0F172A"/>
                           </a:solidFill>
@@ -21038,7 +21011,7 @@
                         </a:defRPr>
                       </a:pPr>
                       <a:r>
-                        <a:t>在 90% 超高复用场景下，自研净提速高达 52.6% [模型推导值]</a:t>
+                        <a:t>90% 超高复用场景下，自研净提速高达 52.6% [模型推导值]</a:t>
                       </a:r>
                     </a:p>
                   </a:txBody>
